--- a/docs/week6/serge mideterm report slides.pptx
+++ b/docs/week6/serge mideterm report slides.pptx
@@ -5,7 +5,7 @@
     <p:sldMasterId id="2147483875" r:id="rId4"/>
   </p:sldMasterIdLst>
   <p:sldIdLst>
-    <p:sldId id="262" r:id="rId5"/>
+    <p:sldId id="282" r:id="rId5"/>
     <p:sldId id="263" r:id="rId6"/>
     <p:sldId id="264" r:id="rId7"/>
     <p:sldId id="265" r:id="rId8"/>
@@ -16,7 +16,8 @@
     <p:sldId id="269" r:id="rId13"/>
     <p:sldId id="270" r:id="rId14"/>
     <p:sldId id="271" r:id="rId15"/>
-    <p:sldId id="273" r:id="rId16"/>
+    <p:sldId id="286" r:id="rId16"/>
+    <p:sldId id="273" r:id="rId17"/>
   </p:sldIdLst>
   <p:sldSz cx="12192000" cy="6858000"/>
   <p:notesSz cx="6858000" cy="9144000"/>
@@ -121,14 +122,6 @@
     </p:ext>
   </p:extLst>
 </p:presentation>
-</file>
-
-<file path=ppt/revisionInfo.xml><?xml version="1.0" encoding="utf-8"?>
-<p1510:revInfo xmlns:a="http://schemas.openxmlformats.org/drawingml/2006/main" xmlns:r="http://schemas.openxmlformats.org/officeDocument/2006/relationships" xmlns:p1510="http://schemas.microsoft.com/office/powerpoint/2015/10/main">
-  <p1510:revLst>
-    <p1510:client id="{9C27275A-5004-4488-BB2B-8541C3EB84DB}" v="6" dt="2018-08-08T09:05:58.341"/>
-  </p1510:revLst>
-</p1510:revInfo>
 </file>
 
 <file path=ppt/slideLayouts/slideLayout1.xml><?xml version="1.0" encoding="utf-8"?>
@@ -2981,7 +2974,9 @@
     <p:bg>
       <p:bgPr>
         <a:solidFill>
-          <a:schemeClr val="bg1"/>
+          <a:srgbClr val="2D5BFF">
+            <a:alpha val="100000"/>
+          </a:srgbClr>
         </a:solidFill>
         <a:effectLst/>
       </p:bgPr>
@@ -3002,438 +2997,606 @@
       </p:grpSpPr>
       <p:sp>
         <p:nvSpPr>
-          <p:cNvPr id="2" name="Rectangle 1">
-            <a:extLst>
-              <a:ext uri="{FF2B5EF4-FFF2-40B4-BE49-F238E27FC236}">
-                <a16:creationId xmlns:a16="http://schemas.microsoft.com/office/drawing/2014/main" id="{E93BE2C4-B716-1E4E-BCA9-9DDBADDBEDE8}"/>
-              </a:ext>
-            </a:extLst>
-          </p:cNvPr>
+          <p:cNvPr id="10" name="DecoCircle1"/>
           <p:cNvSpPr/>
           <p:nvPr/>
         </p:nvSpPr>
         <p:spPr>
           <a:xfrm>
-            <a:off x="0" y="0"/>
-            <a:ext cx="4318000" cy="6858000"/>
-          </a:xfrm>
-          <a:prstGeom prst="rect">
+            <a:off x="8636000" y="-1524000"/>
+            <a:ext cx="5080000" cy="5080000"/>
+          </a:xfrm>
+          <a:prstGeom prst="ellipse">
             <a:avLst/>
           </a:prstGeom>
           <a:solidFill>
-            <a:srgbClr val="2D5BFF"/>
+            <a:srgbClr val="FFFFFF">
+              <a:alpha val="8000"/>
+            </a:srgbClr>
           </a:solidFill>
-          <a:ln w="12700" cap="flat" cmpd="sng" algn="ctr">
+          <a:ln w="0">
             <a:noFill/>
-            <a:prstDash val="solid"/>
-            <a:miter lim="800000"/>
           </a:ln>
+        </p:spPr>
+        <p:txBody>
+          <a:bodyPr/>
+          <a:lstStyle/>
+          <a:p>
+            <a:endParaRPr lang="fr-FR"/>
+          </a:p>
+        </p:txBody>
+      </p:sp>
+      <p:sp>
+        <p:nvSpPr>
+          <p:cNvPr id="11" name="DecoCircle2"/>
+          <p:cNvSpPr/>
+          <p:nvPr/>
+        </p:nvSpPr>
+        <p:spPr>
+          <a:xfrm>
+            <a:off x="-1016000" y="4318000"/>
+            <a:ext cx="3556000" cy="3556000"/>
+          </a:xfrm>
+          <a:prstGeom prst="ellipse">
+            <a:avLst/>
+          </a:prstGeom>
+          <a:solidFill>
+            <a:srgbClr val="FFFFFF">
+              <a:alpha val="6000"/>
+            </a:srgbClr>
+          </a:solidFill>
+          <a:ln w="0">
+            <a:noFill/>
+          </a:ln>
+        </p:spPr>
+        <p:txBody>
+          <a:bodyPr/>
+          <a:lstStyle/>
+          <a:p>
+            <a:endParaRPr lang="fr-FR"/>
+          </a:p>
+        </p:txBody>
+      </p:sp>
+      <p:sp>
+        <p:nvSpPr>
+          <p:cNvPr id="12" name="DecoCircle3"/>
+          <p:cNvSpPr/>
+          <p:nvPr/>
+        </p:nvSpPr>
+        <p:spPr>
+          <a:xfrm>
+            <a:off x="10795000" y="4064000"/>
+            <a:ext cx="1778000" cy="1778000"/>
+          </a:xfrm>
+          <a:prstGeom prst="ellipse">
+            <a:avLst/>
+          </a:prstGeom>
+          <a:solidFill>
+            <a:srgbClr val="FFFFFF">
+              <a:alpha val="5000"/>
+            </a:srgbClr>
+          </a:solidFill>
+          <a:ln w="0">
+            <a:noFill/>
+          </a:ln>
+        </p:spPr>
+        <p:txBody>
+          <a:bodyPr/>
+          <a:lstStyle/>
+          <a:p>
+            <a:endParaRPr lang="fr-FR"/>
+          </a:p>
+        </p:txBody>
+      </p:sp>
+      <p:sp>
+        <p:nvSpPr>
+          <p:cNvPr id="13" name="AccentLine"/>
+          <p:cNvSpPr/>
+          <p:nvPr/>
+        </p:nvSpPr>
+        <p:spPr>
+          <a:xfrm>
+            <a:off x="1016000" y="3327400"/>
+            <a:ext cx="1270000" cy="38100"/>
+          </a:xfrm>
+          <a:prstGeom prst="rect">
+            <a:avLst/>
+          </a:prstGeom>
+          <a:solidFill>
+            <a:srgbClr val="FFFFFF">
+              <a:alpha val="90000"/>
+            </a:srgbClr>
+          </a:solidFill>
+          <a:ln w="0">
+            <a:noFill/>
+          </a:ln>
+        </p:spPr>
+        <p:txBody>
+          <a:bodyPr/>
+          <a:lstStyle/>
+          <a:p>
+            <a:endParaRPr lang="fr-FR"/>
+          </a:p>
+        </p:txBody>
+      </p:sp>
+      <p:sp>
+        <p:nvSpPr>
+          <p:cNvPr id="20" name="MainTitle"/>
+          <p:cNvSpPr/>
+          <p:nvPr/>
+        </p:nvSpPr>
+        <p:spPr>
+          <a:xfrm>
+            <a:off x="1016000" y="1714500"/>
+            <a:ext cx="6350000" cy="1524000"/>
+          </a:xfrm>
+          <a:prstGeom prst="rect">
+            <a:avLst/>
+          </a:prstGeom>
+          <a:noFill/>
+          <a:ln w="0">
+            <a:noFill/>
+          </a:ln>
+        </p:spPr>
+        <p:txBody>
+          <a:bodyPr wrap="square" lIns="0" tIns="0" rIns="0" bIns="0" anchor="b"/>
+          <a:lstStyle/>
+          <a:p>
+            <a:pPr algn="l"/>
+            <a:r>
+              <a:rPr lang="fr-FR" sz="7200" b="1" spc="600" dirty="0">
+                <a:solidFill>
+                  <a:srgbClr val="FFFFFF"/>
+                </a:solidFill>
+                <a:latin typeface="Inter"/>
+              </a:rPr>
+              <a:t>SERGE</a:t>
+            </a:r>
+          </a:p>
+        </p:txBody>
+      </p:sp>
+      <p:sp>
+        <p:nvSpPr>
+          <p:cNvPr id="21" name="Subtitle"/>
+          <p:cNvSpPr/>
+          <p:nvPr/>
+        </p:nvSpPr>
+        <p:spPr>
+          <a:xfrm>
+            <a:off x="1016000" y="3492500"/>
+            <a:ext cx="5334000" cy="762000"/>
+          </a:xfrm>
+          <a:prstGeom prst="rect">
+            <a:avLst/>
+          </a:prstGeom>
+          <a:noFill/>
+          <a:ln w="0">
+            <a:noFill/>
+          </a:ln>
+        </p:spPr>
+        <p:txBody>
+          <a:bodyPr wrap="square" lIns="0" tIns="0" rIns="0" bIns="0" anchor="t"/>
+          <a:lstStyle/>
+          <a:p>
+            <a:pPr algn="l">
+              <a:lnSpc>
+                <a:spcPts val="2600"/>
+              </a:lnSpc>
+            </a:pPr>
+            <a:r>
+              <a:rPr lang="fr-FR" sz="2000" dirty="0">
+                <a:solidFill>
+                  <a:srgbClr val="FFFFFF">
+                    <a:alpha val="85000"/>
+                  </a:srgbClr>
+                </a:solidFill>
+                <a:latin typeface="Inter"/>
+              </a:rPr>
+              <a:t>AI Agent for Supply Chain Operations</a:t>
+            </a:r>
+          </a:p>
+        </p:txBody>
+      </p:sp>
+      <p:sp>
+        <p:nvSpPr>
+          <p:cNvPr id="30" name="CoursePill"/>
+          <p:cNvSpPr/>
+          <p:nvPr/>
+        </p:nvSpPr>
+        <p:spPr>
+          <a:xfrm>
+            <a:off x="1016000" y="914400"/>
+            <a:ext cx="4318000" cy="406400"/>
+          </a:xfrm>
+          <a:prstGeom prst="roundRect">
+            <a:avLst>
+              <a:gd name="adj" fmla="val 50000"/>
+            </a:avLst>
+          </a:prstGeom>
+          <a:solidFill>
+            <a:srgbClr val="FFFFFF">
+              <a:alpha val="18000"/>
+            </a:srgbClr>
+          </a:solidFill>
+          <a:ln w="0">
+            <a:noFill/>
+          </a:ln>
+        </p:spPr>
+        <p:txBody>
+          <a:bodyPr wrap="square" lIns="91440" tIns="0" rIns="91440" bIns="0" anchor="ctr"/>
+          <a:lstStyle/>
+          <a:p>
+            <a:pPr algn="ctr"/>
+            <a:r>
+              <a:rPr lang="fr-FR" sz="1400" spc="100" dirty="0">
+                <a:solidFill>
+                  <a:srgbClr val="FFFFFF">
+                    <a:alpha val="90000"/>
+                  </a:srgbClr>
+                </a:solidFill>
+                <a:latin typeface="Inter"/>
+              </a:rPr>
+              <a:t>SE618 — Logistic Case Study Analysis</a:t>
+            </a:r>
+          </a:p>
+        </p:txBody>
+      </p:sp>
+      <p:sp>
+        <p:nvSpPr>
+          <p:cNvPr id="40" name="ContentCard"/>
+          <p:cNvSpPr/>
+          <p:nvPr/>
+        </p:nvSpPr>
+        <p:spPr>
+          <a:xfrm>
+            <a:off x="6959600" y="1651000"/>
+            <a:ext cx="2184400" cy="2857500"/>
+          </a:xfrm>
+          <a:prstGeom prst="roundRect">
+            <a:avLst>
+              <a:gd name="adj" fmla="val 5000"/>
+            </a:avLst>
+          </a:prstGeom>
+          <a:ln/>
         </p:spPr>
         <p:style>
           <a:lnRef idx="2">
-            <a:schemeClr val="accent1">
-              <a:shade val="15000"/>
-            </a:schemeClr>
+            <a:schemeClr val="dk1"/>
           </a:lnRef>
           <a:fillRef idx="1">
-            <a:schemeClr val="accent1"/>
+            <a:schemeClr val="lt1"/>
           </a:fillRef>
           <a:effectRef idx="0">
-            <a:schemeClr val="accent1"/>
+            <a:schemeClr val="dk1"/>
           </a:effectRef>
           <a:fontRef idx="minor">
-            <a:schemeClr val="lt1"/>
+            <a:schemeClr val="dk1"/>
           </a:fontRef>
         </p:style>
         <p:txBody>
-          <a:bodyPr vertOverflow="clip" horzOverflow="clip" rtlCol="0" anchor="t"/>
-          <a:lstStyle/>
-          <a:p>
-            <a:pPr algn="l"/>
-            <a:endParaRPr lang="fr-FR"/>
-          </a:p>
-        </p:txBody>
-      </p:sp>
-      <p:sp>
-        <p:nvSpPr>
-          <p:cNvPr id="3" name="ZoneTexte 2">
-            <a:extLst>
-              <a:ext uri="{FF2B5EF4-FFF2-40B4-BE49-F238E27FC236}">
-                <a16:creationId xmlns:a16="http://schemas.microsoft.com/office/drawing/2014/main" id="{4179038E-68A1-144C-8615-CE96E0C21106}"/>
-              </a:ext>
-            </a:extLst>
-          </p:cNvPr>
-          <p:cNvSpPr txBox="1"/>
-          <p:nvPr/>
-        </p:nvSpPr>
-        <p:spPr>
-          <a:xfrm>
-            <a:off x="508000" y="2159000"/>
-            <a:ext cx="3302000" cy="762000"/>
-          </a:xfrm>
-          <a:prstGeom prst="rect">
-            <a:avLst/>
-          </a:prstGeom>
-          <a:noFill/>
-        </p:spPr>
-        <p:txBody>
-          <a:bodyPr vertOverflow="overflow" vert="horz" wrap="square" rtlCol="0" anchor="t">
-            <a:spAutoFit/>
-          </a:bodyPr>
-          <a:lstStyle/>
-          <a:p>
-            <a:pPr algn="l"/>
-            <a:r>
-              <a:rPr lang="fr-FR" sz="4400" b="1">
-                <a:solidFill>
-                  <a:srgbClr val="FFFFFF"/>
-                </a:solidFill>
-              </a:rPr>
-              <a:t>SERGE</a:t>
-            </a:r>
-          </a:p>
-        </p:txBody>
-      </p:sp>
-      <p:sp>
-        <p:nvSpPr>
-          <p:cNvPr id="4" name="ZoneTexte 3">
-            <a:extLst>
-              <a:ext uri="{FF2B5EF4-FFF2-40B4-BE49-F238E27FC236}">
-                <a16:creationId xmlns:a16="http://schemas.microsoft.com/office/drawing/2014/main" id="{BA68A7E3-709D-BB42-AF2D-943307A096FB}"/>
-              </a:ext>
-            </a:extLst>
-          </p:cNvPr>
-          <p:cNvSpPr txBox="1"/>
-          <p:nvPr/>
-        </p:nvSpPr>
-        <p:spPr>
-          <a:xfrm>
-            <a:off x="508000" y="2984500"/>
-            <a:ext cx="3302000" cy="1143000"/>
-          </a:xfrm>
-          <a:prstGeom prst="rect">
-            <a:avLst/>
-          </a:prstGeom>
-          <a:noFill/>
-        </p:spPr>
-        <p:txBody>
-          <a:bodyPr vertOverflow="overflow" vert="horz" wrap="square" rtlCol="0" anchor="t">
-            <a:spAutoFit/>
-          </a:bodyPr>
-          <a:lstStyle/>
-          <a:p>
-            <a:pPr algn="l"/>
-            <a:r>
-              <a:rPr lang="fr-FR" sz="2000">
-                <a:solidFill>
-                  <a:srgbClr val="FFFFFF"/>
-                </a:solidFill>
-              </a:rPr>
-              <a:t>AI Agent for
-Supply Chain
-Operations</a:t>
-            </a:r>
-          </a:p>
-        </p:txBody>
-      </p:sp>
-      <p:sp>
-        <p:nvSpPr>
-          <p:cNvPr id="5" name="ZoneTexte 4">
-            <a:extLst>
-              <a:ext uri="{FF2B5EF4-FFF2-40B4-BE49-F238E27FC236}">
-                <a16:creationId xmlns:a16="http://schemas.microsoft.com/office/drawing/2014/main" id="{4ED4FE85-EF58-3C48-86B7-0D37E7D2D8DD}"/>
-              </a:ext>
-            </a:extLst>
-          </p:cNvPr>
-          <p:cNvSpPr txBox="1"/>
-          <p:nvPr/>
-        </p:nvSpPr>
-        <p:spPr>
-          <a:xfrm>
-            <a:off x="5342745" y="1544404"/>
-            <a:ext cx="6604000" cy="338554"/>
-          </a:xfrm>
-          <a:prstGeom prst="rect">
-            <a:avLst/>
-          </a:prstGeom>
-          <a:noFill/>
-        </p:spPr>
-        <p:txBody>
-          <a:bodyPr vertOverflow="overflow" vert="horz" wrap="square" rtlCol="0" anchor="t">
-            <a:spAutoFit/>
-          </a:bodyPr>
-          <a:lstStyle/>
-          <a:p>
-            <a:pPr algn="l"/>
-            <a:r>
-              <a:rPr lang="fr-FR" sz="1600" b="1" dirty="0">
-                <a:solidFill>
-                  <a:srgbClr val="0070C0"/>
-                </a:solidFill>
-              </a:rPr>
-              <a:t>SE618 </a:t>
-            </a:r>
-            <a:r>
-              <a:rPr lang="fr-FR" sz="1600" b="1" dirty="0" err="1">
-                <a:solidFill>
-                  <a:srgbClr val="0070C0"/>
-                </a:solidFill>
-              </a:rPr>
-              <a:t>Logistic</a:t>
-            </a:r>
-            <a:r>
-              <a:rPr lang="fr-FR" sz="1600" b="1" dirty="0">
-                <a:solidFill>
-                  <a:srgbClr val="0070C0"/>
-                </a:solidFill>
-              </a:rPr>
-              <a:t> Case </a:t>
-            </a:r>
-            <a:r>
-              <a:rPr lang="fr-FR" sz="1600" b="1" dirty="0" err="1">
-                <a:solidFill>
-                  <a:srgbClr val="0070C0"/>
-                </a:solidFill>
-              </a:rPr>
-              <a:t>Study</a:t>
-            </a:r>
-            <a:r>
-              <a:rPr lang="fr-FR" sz="1600" b="1" dirty="0">
-                <a:solidFill>
-                  <a:srgbClr val="0070C0"/>
-                </a:solidFill>
-              </a:rPr>
-              <a:t> </a:t>
-            </a:r>
-            <a:r>
-              <a:rPr lang="fr-FR" sz="1600" b="1" dirty="0" err="1">
-                <a:solidFill>
-                  <a:srgbClr val="0070C0"/>
-                </a:solidFill>
-              </a:rPr>
-              <a:t>Analysis</a:t>
-            </a:r>
-            <a:endParaRPr lang="fr-FR" sz="1600" b="1" dirty="0">
-              <a:solidFill>
-                <a:srgbClr val="0070C0"/>
-              </a:solidFill>
-            </a:endParaRPr>
-          </a:p>
-        </p:txBody>
-      </p:sp>
-      <p:sp>
-        <p:nvSpPr>
-          <p:cNvPr id="7" name="ZoneTexte 6">
-            <a:extLst>
-              <a:ext uri="{FF2B5EF4-FFF2-40B4-BE49-F238E27FC236}">
-                <a16:creationId xmlns:a16="http://schemas.microsoft.com/office/drawing/2014/main" id="{0643419F-B9F8-1F4E-8281-42C62AFC9EB2}"/>
-              </a:ext>
-            </a:extLst>
-          </p:cNvPr>
-          <p:cNvSpPr txBox="1"/>
-          <p:nvPr/>
-        </p:nvSpPr>
-        <p:spPr>
-          <a:xfrm>
-            <a:off x="5342745" y="1967850"/>
-            <a:ext cx="6604000" cy="338554"/>
-          </a:xfrm>
-          <a:prstGeom prst="rect">
-            <a:avLst/>
-          </a:prstGeom>
-          <a:noFill/>
-        </p:spPr>
-        <p:txBody>
-          <a:bodyPr vertOverflow="overflow" vert="horz" wrap="square" rtlCol="0" anchor="t">
-            <a:spAutoFit/>
-          </a:bodyPr>
-          <a:lstStyle/>
-          <a:p>
-            <a:pPr algn="l"/>
-            <a:r>
-              <a:rPr lang="fr-FR" sz="1600" dirty="0"/>
-              <a:t>March 2026  •  </a:t>
-            </a:r>
-            <a:r>
-              <a:rPr lang="fr-FR" sz="1600" dirty="0" err="1"/>
-              <a:t>Semester</a:t>
-            </a:r>
-            <a:r>
-              <a:rPr lang="fr-FR" sz="1600" dirty="0"/>
-              <a:t> 2/2025</a:t>
-            </a:r>
-          </a:p>
-        </p:txBody>
-      </p:sp>
-      <p:sp>
-        <p:nvSpPr>
-          <p:cNvPr id="8" name="ZoneTexte 7">
-            <a:extLst>
-              <a:ext uri="{FF2B5EF4-FFF2-40B4-BE49-F238E27FC236}">
-                <a16:creationId xmlns:a16="http://schemas.microsoft.com/office/drawing/2014/main" id="{F4CEE079-9094-D04F-A42E-73AF49FD790D}"/>
-              </a:ext>
-            </a:extLst>
-          </p:cNvPr>
-          <p:cNvSpPr txBox="1"/>
-          <p:nvPr/>
-        </p:nvSpPr>
-        <p:spPr>
-          <a:xfrm>
-            <a:off x="5342745" y="2572072"/>
-            <a:ext cx="6604000" cy="738664"/>
-          </a:xfrm>
-          <a:prstGeom prst="rect">
-            <a:avLst/>
-          </a:prstGeom>
-          <a:noFill/>
-        </p:spPr>
-        <p:txBody>
-          <a:bodyPr vertOverflow="overflow" vert="horz" wrap="square" rtlCol="0" anchor="t">
-            <a:spAutoFit/>
-          </a:bodyPr>
-          <a:lstStyle/>
-          <a:p>
-            <a:pPr algn="l"/>
-            <a:r>
-              <a:rPr lang="fr-FR" sz="1400" dirty="0"/>
-              <a:t>
-</a:t>
-            </a:r>
-            <a:r>
-              <a:rPr lang="fr-FR" sz="1400" dirty="0" err="1"/>
-              <a:t>Sirindhorn</a:t>
-            </a:r>
-            <a:r>
-              <a:rPr lang="fr-FR" sz="1400" dirty="0"/>
-              <a:t> International Institute of </a:t>
-            </a:r>
-            <a:r>
-              <a:rPr lang="fr-FR" sz="1400" dirty="0" err="1"/>
-              <a:t>Technology</a:t>
-            </a:r>
-            <a:r>
-              <a:rPr lang="fr-FR" sz="1400" dirty="0"/>
-              <a:t>
-</a:t>
-            </a:r>
-            <a:r>
-              <a:rPr lang="fr-FR" sz="1400" dirty="0" err="1"/>
-              <a:t>Thammasat</a:t>
-            </a:r>
-            <a:r>
-              <a:rPr lang="fr-FR" sz="1400" dirty="0"/>
-              <a:t> </a:t>
-            </a:r>
-            <a:r>
-              <a:rPr lang="fr-FR" sz="1400" dirty="0" err="1"/>
-              <a:t>University</a:t>
-            </a:r>
-            <a:endParaRPr lang="fr-FR" sz="1400" dirty="0"/>
-          </a:p>
-        </p:txBody>
-      </p:sp>
-      <p:sp>
-        <p:nvSpPr>
-          <p:cNvPr id="11" name="ZoneTexte 10">
-            <a:extLst>
-              <a:ext uri="{FF2B5EF4-FFF2-40B4-BE49-F238E27FC236}">
-                <a16:creationId xmlns:a16="http://schemas.microsoft.com/office/drawing/2014/main" id="{7E57D419-49DA-409D-5B19-FCF124CB0883}"/>
-              </a:ext>
-            </a:extLst>
-          </p:cNvPr>
-          <p:cNvSpPr txBox="1"/>
-          <p:nvPr/>
-        </p:nvSpPr>
-        <p:spPr>
-          <a:xfrm>
-            <a:off x="5342745" y="4009630"/>
-            <a:ext cx="6100996" cy="1754326"/>
-          </a:xfrm>
-          <a:prstGeom prst="rect">
-            <a:avLst/>
-          </a:prstGeom>
-          <a:noFill/>
-        </p:spPr>
-        <p:txBody>
-          <a:bodyPr wrap="square">
-            <a:spAutoFit/>
-          </a:bodyPr>
-          <a:lstStyle/>
-          <a:p>
-            <a:pPr rtl="0">
-              <a:buNone/>
+          <a:bodyPr wrap="square" lIns="203200" tIns="203200" rIns="203200" bIns="152400" anchor="t"/>
+          <a:lstStyle/>
+          <a:p>
+            <a:pPr algn="l">
+              <a:spcAft>
+                <a:spcPts val="400"/>
+              </a:spcAft>
             </a:pPr>
             <a:r>
-              <a:rPr lang="fr-FR" sz="1800" b="1" i="0" u="none" strike="noStrike" dirty="0">
-                <a:effectLst/>
+              <a:rPr lang="fr-FR" sz="1400" spc="200" dirty="0">
+                <a:solidFill>
+                  <a:srgbClr val="2D5BFF"/>
+                </a:solidFill>
                 <a:latin typeface="Inter"/>
               </a:rPr>
-              <a:t>Gauthier SCHMITT - 6822807466</a:t>
-            </a:r>
-            <a:endParaRPr lang="fr-FR" b="0" dirty="0">
-              <a:effectLst/>
-            </a:endParaRPr>
-          </a:p>
-          <a:p>
-            <a:pPr rtl="0">
-              <a:buNone/>
+              <a:t>TEAM MEMBERS</a:t>
+            </a:r>
+          </a:p>
+          <a:p>
+            <a:pPr algn="l">
+              <a:lnSpc>
+                <a:spcPts val="2200"/>
+              </a:lnSpc>
+              <a:spcAft>
+                <a:spcPts val="0"/>
+              </a:spcAft>
             </a:pPr>
             <a:r>
-              <a:rPr lang="fr-FR" sz="1800" b="1" i="0" u="none" strike="noStrike" dirty="0">
-                <a:effectLst/>
+              <a:rPr lang="fr-FR" sz="1500" b="1" dirty="0">
+                <a:solidFill>
+                  <a:srgbClr val="1A1A2E"/>
+                </a:solidFill>
                 <a:latin typeface="Inter"/>
               </a:rPr>
-              <a:t>Louis GRIGNOLA - 6822807516</a:t>
-            </a:r>
-            <a:endParaRPr lang="fr-FR" b="0" dirty="0">
-              <a:effectLst/>
-            </a:endParaRPr>
-          </a:p>
-          <a:p>
-            <a:pPr rtl="0">
-              <a:buNone/>
+              <a:t>Gauthier SCHMITT</a:t>
+            </a:r>
+          </a:p>
+          <a:p>
+            <a:pPr algn="l">
+              <a:lnSpc>
+                <a:spcPts val="1600"/>
+              </a:lnSpc>
+              <a:spcAft>
+                <a:spcPts val="300"/>
+              </a:spcAft>
             </a:pPr>
             <a:r>
-              <a:rPr lang="fr-FR" sz="1800" b="1" i="0" u="none" strike="noStrike" dirty="0">
-                <a:effectLst/>
+              <a:rPr lang="fr-FR" sz="1400" dirty="0">
+                <a:solidFill>
+                  <a:srgbClr val="888888"/>
+                </a:solidFill>
                 <a:latin typeface="Inter"/>
               </a:rPr>
-              <a:t>Matteo SCHWARZ - 6822807557</a:t>
-            </a:r>
-            <a:endParaRPr lang="fr-FR" b="0" dirty="0">
-              <a:effectLst/>
-            </a:endParaRPr>
-          </a:p>
-          <a:p>
-            <a:pPr rtl="0">
-              <a:buNone/>
+              <a:t>6822807466</a:t>
+            </a:r>
+          </a:p>
+          <a:p>
+            <a:pPr algn="l">
+              <a:lnSpc>
+                <a:spcPts val="2200"/>
+              </a:lnSpc>
+              <a:spcAft>
+                <a:spcPts val="0"/>
+              </a:spcAft>
             </a:pPr>
             <a:r>
-              <a:rPr lang="fr-FR" sz="1800" b="1" i="0" u="none" strike="noStrike" dirty="0">
-                <a:effectLst/>
+              <a:rPr lang="fr-FR" sz="1500" b="1" dirty="0">
+                <a:solidFill>
+                  <a:srgbClr val="1A1A2E"/>
+                </a:solidFill>
                 <a:latin typeface="Inter"/>
               </a:rPr>
-              <a:t>Maël TELLUS - 6822807532</a:t>
-            </a:r>
-            <a:endParaRPr lang="fr-FR" b="0" dirty="0">
-              <a:effectLst/>
-            </a:endParaRPr>
-          </a:p>
-          <a:p>
-            <a:pPr>
-              <a:buNone/>
+              <a:t>Louis GRIGNOLA</a:t>
+            </a:r>
+          </a:p>
+          <a:p>
+            <a:pPr algn="l">
+              <a:lnSpc>
+                <a:spcPts val="1600"/>
+              </a:lnSpc>
+              <a:spcAft>
+                <a:spcPts val="300"/>
+              </a:spcAft>
             </a:pPr>
-            <a:br>
-              <a:rPr lang="fr-FR" dirty="0"/>
-            </a:br>
-            <a:endParaRPr lang="fr-FR" dirty="0"/>
-          </a:p>
-        </p:txBody>
-      </p:sp>
+            <a:r>
+              <a:rPr lang="fr-FR" sz="1400" dirty="0">
+                <a:solidFill>
+                  <a:srgbClr val="888888"/>
+                </a:solidFill>
+                <a:latin typeface="Inter"/>
+              </a:rPr>
+              <a:t>6822807516</a:t>
+            </a:r>
+          </a:p>
+          <a:p>
+            <a:pPr algn="l">
+              <a:lnSpc>
+                <a:spcPts val="2200"/>
+              </a:lnSpc>
+              <a:spcAft>
+                <a:spcPts val="0"/>
+              </a:spcAft>
+            </a:pPr>
+            <a:r>
+              <a:rPr lang="fr-FR" sz="1500" b="1" dirty="0">
+                <a:solidFill>
+                  <a:srgbClr val="1A1A2E"/>
+                </a:solidFill>
+                <a:latin typeface="Inter"/>
+              </a:rPr>
+              <a:t>Matteo SCHWARZ</a:t>
+            </a:r>
+          </a:p>
+          <a:p>
+            <a:pPr algn="l">
+              <a:lnSpc>
+                <a:spcPts val="1600"/>
+              </a:lnSpc>
+              <a:spcAft>
+                <a:spcPts val="300"/>
+              </a:spcAft>
+            </a:pPr>
+            <a:r>
+              <a:rPr lang="fr-FR" sz="1400" dirty="0">
+                <a:solidFill>
+                  <a:srgbClr val="888888"/>
+                </a:solidFill>
+                <a:latin typeface="Inter"/>
+              </a:rPr>
+              <a:t>6822807557</a:t>
+            </a:r>
+          </a:p>
+          <a:p>
+            <a:pPr algn="l">
+              <a:lnSpc>
+                <a:spcPts val="2200"/>
+              </a:lnSpc>
+              <a:spcAft>
+                <a:spcPts val="0"/>
+              </a:spcAft>
+            </a:pPr>
+            <a:r>
+              <a:rPr lang="fr-FR" sz="1500" b="1" dirty="0">
+                <a:solidFill>
+                  <a:srgbClr val="1A1A2E"/>
+                </a:solidFill>
+                <a:latin typeface="Inter"/>
+              </a:rPr>
+              <a:t>Maël TELLUS</a:t>
+            </a:r>
+          </a:p>
+          <a:p>
+            <a:pPr algn="l">
+              <a:lnSpc>
+                <a:spcPts val="1600"/>
+              </a:lnSpc>
+            </a:pPr>
+            <a:r>
+              <a:rPr lang="fr-FR" sz="1400" dirty="0">
+                <a:solidFill>
+                  <a:srgbClr val="888888"/>
+                </a:solidFill>
+                <a:latin typeface="Inter"/>
+              </a:rPr>
+              <a:t>6822807532</a:t>
+            </a:r>
+          </a:p>
+        </p:txBody>
+      </p:sp>
+      <p:sp>
+        <p:nvSpPr>
+          <p:cNvPr id="50" name="FooterInfo"/>
+          <p:cNvSpPr/>
+          <p:nvPr/>
+        </p:nvSpPr>
+        <p:spPr>
+          <a:xfrm>
+            <a:off x="1016000" y="5715000"/>
+            <a:ext cx="5334000" cy="762000"/>
+          </a:xfrm>
+          <a:prstGeom prst="rect">
+            <a:avLst/>
+          </a:prstGeom>
+          <a:noFill/>
+          <a:ln w="0">
+            <a:noFill/>
+          </a:ln>
+        </p:spPr>
+        <p:txBody>
+          <a:bodyPr wrap="square" lIns="0" tIns="0" rIns="0" bIns="0" anchor="b"/>
+          <a:lstStyle/>
+          <a:p>
+            <a:pPr algn="l">
+              <a:lnSpc>
+                <a:spcPts val="1800"/>
+              </a:lnSpc>
+            </a:pPr>
+            <a:r>
+              <a:rPr lang="fr-FR" sz="1400" dirty="0">
+                <a:solidFill>
+                  <a:srgbClr val="FFFFFF">
+                    <a:alpha val="70000"/>
+                  </a:srgbClr>
+                </a:solidFill>
+                <a:latin typeface="Inter"/>
+              </a:rPr>
+              <a:t>Sirindhorn International Institute of Technology</a:t>
+            </a:r>
+          </a:p>
+          <a:p>
+            <a:pPr algn="l">
+              <a:lnSpc>
+                <a:spcPts val="1800"/>
+              </a:lnSpc>
+            </a:pPr>
+            <a:r>
+              <a:rPr lang="fr-FR" sz="1400" dirty="0">
+                <a:solidFill>
+                  <a:srgbClr val="FFFFFF">
+                    <a:alpha val="70000"/>
+                  </a:srgbClr>
+                </a:solidFill>
+                <a:latin typeface="Inter"/>
+              </a:rPr>
+              <a:t>Thammasat University  •  March 2026  •  Semester 2/2025</a:t>
+            </a:r>
+          </a:p>
+        </p:txBody>
+      </p:sp>
+      <p:pic>
+        <p:nvPicPr>
+          <p:cNvPr id="63" name="Graphic 63" descr="AI icon"/>
+          <p:cNvPicPr>
+            <a:picLocks noChangeAspect="1"/>
+          </p:cNvPicPr>
+          <p:nvPr/>
+        </p:nvPicPr>
+        <p:blipFill>
+          <a:blip>
+            <a:extLst>
+              <a:ext uri="{96DAC541-7B7A-43D3-8B79-37D633B846F1}">
+                <asvg:svgBlip xmlns:asvg="http://schemas.microsoft.com/office/drawing/2016/SVG/main" r:embed="rId2"/>
+              </a:ext>
+            </a:extLst>
+          </a:blip>
+          <a:stretch>
+            <a:fillRect/>
+          </a:stretch>
+        </p:blipFill>
+        <p:spPr>
+          <a:xfrm>
+            <a:off x="1016000" y="4292600"/>
+            <a:ext cx="698500" cy="698500"/>
+          </a:xfrm>
+          <a:prstGeom prst="rect">
+            <a:avLst/>
+          </a:prstGeom>
+        </p:spPr>
+      </p:pic>
+      <p:pic>
+        <p:nvPicPr>
+          <p:cNvPr id="64" name="Graphic 64" descr="Network connections icon"/>
+          <p:cNvPicPr>
+            <a:picLocks noChangeAspect="1"/>
+          </p:cNvPicPr>
+          <p:nvPr/>
+        </p:nvPicPr>
+        <p:blipFill>
+          <a:blip>
+            <a:extLst>
+              <a:ext uri="{96DAC541-7B7A-43D3-8B79-37D633B846F1}">
+                <asvg:svgBlip xmlns:asvg="http://schemas.microsoft.com/office/drawing/2016/SVG/main" r:embed="rId3"/>
+              </a:ext>
+            </a:extLst>
+          </a:blip>
+          <a:stretch>
+            <a:fillRect/>
+          </a:stretch>
+        </p:blipFill>
+        <p:spPr>
+          <a:xfrm>
+            <a:off x="1968500" y="4343400"/>
+            <a:ext cx="571500" cy="571500"/>
+          </a:xfrm>
+          <a:prstGeom prst="rect">
+            <a:avLst/>
+          </a:prstGeom>
+        </p:spPr>
+      </p:pic>
+      <p:pic>
+        <p:nvPicPr>
+          <p:cNvPr id="65" name="Graphic 65" descr="Analytics chart icon"/>
+          <p:cNvPicPr>
+            <a:picLocks noChangeAspect="1"/>
+          </p:cNvPicPr>
+          <p:nvPr/>
+        </p:nvPicPr>
+        <p:blipFill>
+          <a:blip>
+            <a:extLst>
+              <a:ext uri="{96DAC541-7B7A-43D3-8B79-37D633B846F1}">
+                <asvg:svgBlip xmlns:asvg="http://schemas.microsoft.com/office/drawing/2016/SVG/main" r:embed="rId4"/>
+              </a:ext>
+            </a:extLst>
+          </a:blip>
+          <a:stretch>
+            <a:fillRect/>
+          </a:stretch>
+        </p:blipFill>
+        <p:spPr>
+          <a:xfrm>
+            <a:off x="2857500" y="4381500"/>
+            <a:ext cx="508000" cy="508000"/>
+          </a:xfrm>
+          <a:prstGeom prst="rect">
+            <a:avLst/>
+          </a:prstGeom>
+        </p:spPr>
+      </p:pic>
     </p:spTree>
     <p:extLst>
       <p:ext uri="{BB962C8B-B14F-4D97-AF65-F5344CB8AC3E}">
-        <p14:creationId xmlns:p14="http://schemas.microsoft.com/office/powerpoint/2010/main" val="370269800"/>
+        <p14:creationId xmlns:p14="http://schemas.microsoft.com/office/powerpoint/2010/main" val="3131534396"/>
       </p:ext>
     </p:extLst>
   </p:cSld>
@@ -6175,6 +6338,2409 @@
 <file path=ppt/slides/slide12.xml><?xml version="1.0" encoding="utf-8"?>
 <p:sld xmlns:a="http://schemas.openxmlformats.org/drawingml/2006/main" xmlns:r="http://schemas.openxmlformats.org/officeDocument/2006/relationships" xmlns:p="http://schemas.openxmlformats.org/presentationml/2006/main">
   <p:cSld>
+    <p:bg>
+      <p:bgPr>
+        <a:solidFill>
+          <a:srgbClr val="FFFFFF">
+            <a:alpha val="100000"/>
+          </a:srgbClr>
+        </a:solidFill>
+        <a:effectLst/>
+      </p:bgPr>
+    </p:bg>
+    <p:spTree>
+      <p:nvGrpSpPr>
+        <p:cNvPr id="1" name=""/>
+        <p:cNvGrpSpPr/>
+        <p:nvPr/>
+      </p:nvGrpSpPr>
+      <p:grpSpPr>
+        <a:xfrm>
+          <a:off x="0" y="0"/>
+          <a:ext cx="0" cy="0"/>
+          <a:chOff x="0" y="0"/>
+          <a:chExt cx="0" cy="0"/>
+        </a:xfrm>
+      </p:grpSpPr>
+      <p:sp>
+        <p:nvSpPr>
+          <p:cNvPr id="100" name="T"/>
+          <p:cNvSpPr/>
+          <p:nvPr/>
+        </p:nvSpPr>
+        <p:spPr>
+          <a:xfrm>
+            <a:off x="698500" y="355600"/>
+            <a:ext cx="7620000" cy="482600"/>
+          </a:xfrm>
+          <a:prstGeom prst="rect">
+            <a:avLst/>
+          </a:prstGeom>
+          <a:noFill/>
+          <a:ln w="0">
+            <a:noFill/>
+          </a:ln>
+        </p:spPr>
+        <p:txBody>
+          <a:bodyPr wrap="square" lIns="0" tIns="0" rIns="0" bIns="0" anchor="t"/>
+          <a:lstStyle/>
+          <a:p>
+            <a:pPr algn="l"/>
+            <a:r>
+              <a:rPr lang="fr-FR" sz="3200" b="1" dirty="0" err="1">
+                <a:solidFill>
+                  <a:srgbClr val="1A1A2E"/>
+                </a:solidFill>
+                <a:latin typeface="Inter"/>
+              </a:rPr>
+              <a:t>Development</a:t>
+            </a:r>
+            <a:r>
+              <a:rPr lang="fr-FR" sz="3200" b="1" dirty="0">
+                <a:solidFill>
+                  <a:srgbClr val="1A1A2E"/>
+                </a:solidFill>
+                <a:latin typeface="Inter"/>
+              </a:rPr>
+              <a:t> Roadmap – Gantt Chart</a:t>
+            </a:r>
+          </a:p>
+        </p:txBody>
+      </p:sp>
+      <p:sp>
+        <p:nvSpPr>
+          <p:cNvPr id="101" name="ST"/>
+          <p:cNvSpPr/>
+          <p:nvPr/>
+        </p:nvSpPr>
+        <p:spPr>
+          <a:xfrm>
+            <a:off x="698500" y="863600"/>
+            <a:ext cx="8890000" cy="279400"/>
+          </a:xfrm>
+          <a:prstGeom prst="rect">
+            <a:avLst/>
+          </a:prstGeom>
+          <a:noFill/>
+          <a:ln w="0">
+            <a:noFill/>
+          </a:ln>
+        </p:spPr>
+        <p:txBody>
+          <a:bodyPr wrap="square" lIns="0" tIns="0" rIns="0" bIns="0" anchor="t"/>
+          <a:lstStyle/>
+          <a:p>
+            <a:pPr algn="l"/>
+            <a:r>
+              <a:rPr lang="fr-FR" sz="1600" dirty="0">
+                <a:solidFill>
+                  <a:srgbClr val="6B6B7B"/>
+                </a:solidFill>
+                <a:latin typeface="Inter"/>
+              </a:rPr>
+              <a:t>SERGE project timeline — March 17 to April 15, 2025</a:t>
+            </a:r>
+          </a:p>
+        </p:txBody>
+      </p:sp>
+      <p:sp>
+        <p:nvSpPr>
+          <p:cNvPr id="102" name="G"/>
+          <p:cNvSpPr/>
+          <p:nvPr/>
+        </p:nvSpPr>
+        <p:spPr>
+          <a:xfrm>
+            <a:off x="2293938" y="1244600"/>
+            <a:ext cx="6350" cy="4279900"/>
+          </a:xfrm>
+          <a:prstGeom prst="rect">
+            <a:avLst/>
+          </a:prstGeom>
+          <a:solidFill>
+            <a:srgbClr val="E0E0E0"/>
+          </a:solidFill>
+          <a:ln w="0">
+            <a:noFill/>
+          </a:ln>
+        </p:spPr>
+        <p:txBody>
+          <a:bodyPr/>
+          <a:lstStyle/>
+          <a:p>
+            <a:endParaRPr lang="fr-FR"/>
+          </a:p>
+        </p:txBody>
+      </p:sp>
+      <p:sp>
+        <p:nvSpPr>
+          <p:cNvPr id="103" name="D"/>
+          <p:cNvSpPr/>
+          <p:nvPr/>
+        </p:nvSpPr>
+        <p:spPr>
+          <a:xfrm>
+            <a:off x="1989138" y="5575300"/>
+            <a:ext cx="635000" cy="177800"/>
+          </a:xfrm>
+          <a:prstGeom prst="rect">
+            <a:avLst/>
+          </a:prstGeom>
+          <a:noFill/>
+          <a:ln w="0">
+            <a:noFill/>
+          </a:ln>
+        </p:spPr>
+        <p:txBody>
+          <a:bodyPr wrap="square" lIns="0" tIns="0" rIns="0" bIns="0" anchor="ctr"/>
+          <a:lstStyle/>
+          <a:p>
+            <a:pPr algn="ctr"/>
+            <a:r>
+              <a:rPr lang="fr-FR" sz="700" dirty="0">
+                <a:solidFill>
+                  <a:srgbClr val="6B6B7B"/>
+                </a:solidFill>
+                <a:latin typeface="Inter"/>
+              </a:rPr>
+              <a:t>Mar 17</a:t>
+            </a:r>
+          </a:p>
+        </p:txBody>
+      </p:sp>
+      <p:sp>
+        <p:nvSpPr>
+          <p:cNvPr id="104" name="G"/>
+          <p:cNvSpPr/>
+          <p:nvPr/>
+        </p:nvSpPr>
+        <p:spPr>
+          <a:xfrm>
+            <a:off x="2817813" y="1244600"/>
+            <a:ext cx="6350" cy="4279900"/>
+          </a:xfrm>
+          <a:prstGeom prst="rect">
+            <a:avLst/>
+          </a:prstGeom>
+          <a:solidFill>
+            <a:srgbClr val="E0E0E0"/>
+          </a:solidFill>
+          <a:ln w="0">
+            <a:noFill/>
+          </a:ln>
+        </p:spPr>
+        <p:txBody>
+          <a:bodyPr/>
+          <a:lstStyle/>
+          <a:p>
+            <a:endParaRPr lang="fr-FR"/>
+          </a:p>
+        </p:txBody>
+      </p:sp>
+      <p:sp>
+        <p:nvSpPr>
+          <p:cNvPr id="105" name="D"/>
+          <p:cNvSpPr/>
+          <p:nvPr/>
+        </p:nvSpPr>
+        <p:spPr>
+          <a:xfrm>
+            <a:off x="2513013" y="5575300"/>
+            <a:ext cx="635000" cy="177800"/>
+          </a:xfrm>
+          <a:prstGeom prst="rect">
+            <a:avLst/>
+          </a:prstGeom>
+          <a:noFill/>
+          <a:ln w="0">
+            <a:noFill/>
+          </a:ln>
+        </p:spPr>
+        <p:txBody>
+          <a:bodyPr wrap="square" lIns="0" tIns="0" rIns="0" bIns="0" anchor="ctr"/>
+          <a:lstStyle/>
+          <a:p>
+            <a:pPr algn="ctr"/>
+            <a:r>
+              <a:rPr lang="fr-FR" sz="700" dirty="0">
+                <a:solidFill>
+                  <a:srgbClr val="6B6B7B"/>
+                </a:solidFill>
+                <a:latin typeface="Inter"/>
+              </a:rPr>
+              <a:t>Mar 19</a:t>
+            </a:r>
+          </a:p>
+        </p:txBody>
+      </p:sp>
+      <p:sp>
+        <p:nvSpPr>
+          <p:cNvPr id="106" name="G"/>
+          <p:cNvSpPr/>
+          <p:nvPr/>
+        </p:nvSpPr>
+        <p:spPr>
+          <a:xfrm>
+            <a:off x="3341688" y="1244600"/>
+            <a:ext cx="6350" cy="4279900"/>
+          </a:xfrm>
+          <a:prstGeom prst="rect">
+            <a:avLst/>
+          </a:prstGeom>
+          <a:solidFill>
+            <a:srgbClr val="E0E0E0"/>
+          </a:solidFill>
+          <a:ln w="0">
+            <a:noFill/>
+          </a:ln>
+        </p:spPr>
+        <p:txBody>
+          <a:bodyPr/>
+          <a:lstStyle/>
+          <a:p>
+            <a:endParaRPr lang="fr-FR"/>
+          </a:p>
+        </p:txBody>
+      </p:sp>
+      <p:sp>
+        <p:nvSpPr>
+          <p:cNvPr id="107" name="D"/>
+          <p:cNvSpPr/>
+          <p:nvPr/>
+        </p:nvSpPr>
+        <p:spPr>
+          <a:xfrm>
+            <a:off x="3036888" y="5575300"/>
+            <a:ext cx="635000" cy="177800"/>
+          </a:xfrm>
+          <a:prstGeom prst="rect">
+            <a:avLst/>
+          </a:prstGeom>
+          <a:noFill/>
+          <a:ln w="0">
+            <a:noFill/>
+          </a:ln>
+        </p:spPr>
+        <p:txBody>
+          <a:bodyPr wrap="square" lIns="0" tIns="0" rIns="0" bIns="0" anchor="ctr"/>
+          <a:lstStyle/>
+          <a:p>
+            <a:pPr algn="ctr"/>
+            <a:r>
+              <a:rPr lang="fr-FR" sz="700" dirty="0">
+                <a:solidFill>
+                  <a:srgbClr val="6B6B7B"/>
+                </a:solidFill>
+                <a:latin typeface="Inter"/>
+              </a:rPr>
+              <a:t>Mar 21</a:t>
+            </a:r>
+          </a:p>
+        </p:txBody>
+      </p:sp>
+      <p:sp>
+        <p:nvSpPr>
+          <p:cNvPr id="108" name="G"/>
+          <p:cNvSpPr/>
+          <p:nvPr/>
+        </p:nvSpPr>
+        <p:spPr>
+          <a:xfrm>
+            <a:off x="3865563" y="1244600"/>
+            <a:ext cx="6350" cy="4279900"/>
+          </a:xfrm>
+          <a:prstGeom prst="rect">
+            <a:avLst/>
+          </a:prstGeom>
+          <a:solidFill>
+            <a:srgbClr val="E0E0E0"/>
+          </a:solidFill>
+          <a:ln w="0">
+            <a:noFill/>
+          </a:ln>
+        </p:spPr>
+        <p:txBody>
+          <a:bodyPr/>
+          <a:lstStyle/>
+          <a:p>
+            <a:endParaRPr lang="fr-FR"/>
+          </a:p>
+        </p:txBody>
+      </p:sp>
+      <p:sp>
+        <p:nvSpPr>
+          <p:cNvPr id="109" name="D"/>
+          <p:cNvSpPr/>
+          <p:nvPr/>
+        </p:nvSpPr>
+        <p:spPr>
+          <a:xfrm>
+            <a:off x="3560763" y="5575300"/>
+            <a:ext cx="635000" cy="177800"/>
+          </a:xfrm>
+          <a:prstGeom prst="rect">
+            <a:avLst/>
+          </a:prstGeom>
+          <a:noFill/>
+          <a:ln w="0">
+            <a:noFill/>
+          </a:ln>
+        </p:spPr>
+        <p:txBody>
+          <a:bodyPr wrap="square" lIns="0" tIns="0" rIns="0" bIns="0" anchor="ctr"/>
+          <a:lstStyle/>
+          <a:p>
+            <a:pPr algn="ctr"/>
+            <a:r>
+              <a:rPr lang="fr-FR" sz="700" dirty="0">
+                <a:solidFill>
+                  <a:srgbClr val="6B6B7B"/>
+                </a:solidFill>
+                <a:latin typeface="Inter"/>
+              </a:rPr>
+              <a:t>Mar 23</a:t>
+            </a:r>
+          </a:p>
+        </p:txBody>
+      </p:sp>
+      <p:sp>
+        <p:nvSpPr>
+          <p:cNvPr id="110" name="G"/>
+          <p:cNvSpPr/>
+          <p:nvPr/>
+        </p:nvSpPr>
+        <p:spPr>
+          <a:xfrm>
+            <a:off x="4389438" y="1244600"/>
+            <a:ext cx="6350" cy="4279900"/>
+          </a:xfrm>
+          <a:prstGeom prst="rect">
+            <a:avLst/>
+          </a:prstGeom>
+          <a:solidFill>
+            <a:srgbClr val="E0E0E0"/>
+          </a:solidFill>
+          <a:ln w="0">
+            <a:noFill/>
+          </a:ln>
+        </p:spPr>
+        <p:txBody>
+          <a:bodyPr/>
+          <a:lstStyle/>
+          <a:p>
+            <a:endParaRPr lang="fr-FR"/>
+          </a:p>
+        </p:txBody>
+      </p:sp>
+      <p:sp>
+        <p:nvSpPr>
+          <p:cNvPr id="111" name="D"/>
+          <p:cNvSpPr/>
+          <p:nvPr/>
+        </p:nvSpPr>
+        <p:spPr>
+          <a:xfrm>
+            <a:off x="4084638" y="5575300"/>
+            <a:ext cx="635000" cy="177800"/>
+          </a:xfrm>
+          <a:prstGeom prst="rect">
+            <a:avLst/>
+          </a:prstGeom>
+          <a:noFill/>
+          <a:ln w="0">
+            <a:noFill/>
+          </a:ln>
+        </p:spPr>
+        <p:txBody>
+          <a:bodyPr wrap="square" lIns="0" tIns="0" rIns="0" bIns="0" anchor="ctr"/>
+          <a:lstStyle/>
+          <a:p>
+            <a:pPr algn="ctr"/>
+            <a:r>
+              <a:rPr lang="fr-FR" sz="700" dirty="0">
+                <a:solidFill>
+                  <a:srgbClr val="6B6B7B"/>
+                </a:solidFill>
+                <a:latin typeface="Inter"/>
+              </a:rPr>
+              <a:t>Mar 25</a:t>
+            </a:r>
+          </a:p>
+        </p:txBody>
+      </p:sp>
+      <p:sp>
+        <p:nvSpPr>
+          <p:cNvPr id="112" name="G"/>
+          <p:cNvSpPr/>
+          <p:nvPr/>
+        </p:nvSpPr>
+        <p:spPr>
+          <a:xfrm>
+            <a:off x="4913313" y="1244600"/>
+            <a:ext cx="6350" cy="4279900"/>
+          </a:xfrm>
+          <a:prstGeom prst="rect">
+            <a:avLst/>
+          </a:prstGeom>
+          <a:solidFill>
+            <a:srgbClr val="E0E0E0"/>
+          </a:solidFill>
+          <a:ln w="0">
+            <a:noFill/>
+          </a:ln>
+        </p:spPr>
+        <p:txBody>
+          <a:bodyPr/>
+          <a:lstStyle/>
+          <a:p>
+            <a:endParaRPr lang="fr-FR"/>
+          </a:p>
+        </p:txBody>
+      </p:sp>
+      <p:sp>
+        <p:nvSpPr>
+          <p:cNvPr id="113" name="D"/>
+          <p:cNvSpPr/>
+          <p:nvPr/>
+        </p:nvSpPr>
+        <p:spPr>
+          <a:xfrm>
+            <a:off x="4608513" y="5575300"/>
+            <a:ext cx="635000" cy="177800"/>
+          </a:xfrm>
+          <a:prstGeom prst="rect">
+            <a:avLst/>
+          </a:prstGeom>
+          <a:noFill/>
+          <a:ln w="0">
+            <a:noFill/>
+          </a:ln>
+        </p:spPr>
+        <p:txBody>
+          <a:bodyPr wrap="square" lIns="0" tIns="0" rIns="0" bIns="0" anchor="ctr"/>
+          <a:lstStyle/>
+          <a:p>
+            <a:pPr algn="ctr"/>
+            <a:r>
+              <a:rPr lang="fr-FR" sz="700" dirty="0">
+                <a:solidFill>
+                  <a:srgbClr val="6B6B7B"/>
+                </a:solidFill>
+                <a:latin typeface="Inter"/>
+              </a:rPr>
+              <a:t>Mar 27</a:t>
+            </a:r>
+          </a:p>
+        </p:txBody>
+      </p:sp>
+      <p:sp>
+        <p:nvSpPr>
+          <p:cNvPr id="114" name="G"/>
+          <p:cNvSpPr/>
+          <p:nvPr/>
+        </p:nvSpPr>
+        <p:spPr>
+          <a:xfrm>
+            <a:off x="5437188" y="1244600"/>
+            <a:ext cx="6350" cy="4279900"/>
+          </a:xfrm>
+          <a:prstGeom prst="rect">
+            <a:avLst/>
+          </a:prstGeom>
+          <a:solidFill>
+            <a:srgbClr val="E0E0E0"/>
+          </a:solidFill>
+          <a:ln w="0">
+            <a:noFill/>
+          </a:ln>
+        </p:spPr>
+        <p:txBody>
+          <a:bodyPr/>
+          <a:lstStyle/>
+          <a:p>
+            <a:endParaRPr lang="fr-FR"/>
+          </a:p>
+        </p:txBody>
+      </p:sp>
+      <p:sp>
+        <p:nvSpPr>
+          <p:cNvPr id="115" name="D"/>
+          <p:cNvSpPr/>
+          <p:nvPr/>
+        </p:nvSpPr>
+        <p:spPr>
+          <a:xfrm>
+            <a:off x="5132388" y="5575300"/>
+            <a:ext cx="635000" cy="177800"/>
+          </a:xfrm>
+          <a:prstGeom prst="rect">
+            <a:avLst/>
+          </a:prstGeom>
+          <a:noFill/>
+          <a:ln w="0">
+            <a:noFill/>
+          </a:ln>
+        </p:spPr>
+        <p:txBody>
+          <a:bodyPr wrap="square" lIns="0" tIns="0" rIns="0" bIns="0" anchor="ctr"/>
+          <a:lstStyle/>
+          <a:p>
+            <a:pPr algn="ctr"/>
+            <a:r>
+              <a:rPr lang="fr-FR" sz="700" dirty="0">
+                <a:solidFill>
+                  <a:srgbClr val="6B6B7B"/>
+                </a:solidFill>
+                <a:latin typeface="Inter"/>
+              </a:rPr>
+              <a:t>Mar 29</a:t>
+            </a:r>
+          </a:p>
+        </p:txBody>
+      </p:sp>
+      <p:sp>
+        <p:nvSpPr>
+          <p:cNvPr id="116" name="G"/>
+          <p:cNvSpPr/>
+          <p:nvPr/>
+        </p:nvSpPr>
+        <p:spPr>
+          <a:xfrm>
+            <a:off x="5961063" y="1244600"/>
+            <a:ext cx="6350" cy="4279900"/>
+          </a:xfrm>
+          <a:prstGeom prst="rect">
+            <a:avLst/>
+          </a:prstGeom>
+          <a:solidFill>
+            <a:srgbClr val="E0E0E0"/>
+          </a:solidFill>
+          <a:ln w="0">
+            <a:noFill/>
+          </a:ln>
+        </p:spPr>
+        <p:txBody>
+          <a:bodyPr/>
+          <a:lstStyle/>
+          <a:p>
+            <a:endParaRPr lang="fr-FR"/>
+          </a:p>
+        </p:txBody>
+      </p:sp>
+      <p:sp>
+        <p:nvSpPr>
+          <p:cNvPr id="117" name="D"/>
+          <p:cNvSpPr/>
+          <p:nvPr/>
+        </p:nvSpPr>
+        <p:spPr>
+          <a:xfrm>
+            <a:off x="5656263" y="5575300"/>
+            <a:ext cx="635000" cy="177800"/>
+          </a:xfrm>
+          <a:prstGeom prst="rect">
+            <a:avLst/>
+          </a:prstGeom>
+          <a:noFill/>
+          <a:ln w="0">
+            <a:noFill/>
+          </a:ln>
+        </p:spPr>
+        <p:txBody>
+          <a:bodyPr wrap="square" lIns="0" tIns="0" rIns="0" bIns="0" anchor="ctr"/>
+          <a:lstStyle/>
+          <a:p>
+            <a:pPr algn="ctr"/>
+            <a:r>
+              <a:rPr lang="fr-FR" sz="700" dirty="0">
+                <a:solidFill>
+                  <a:srgbClr val="6B6B7B"/>
+                </a:solidFill>
+                <a:latin typeface="Inter"/>
+              </a:rPr>
+              <a:t>Mar 31</a:t>
+            </a:r>
+          </a:p>
+        </p:txBody>
+      </p:sp>
+      <p:sp>
+        <p:nvSpPr>
+          <p:cNvPr id="118" name="G"/>
+          <p:cNvSpPr/>
+          <p:nvPr/>
+        </p:nvSpPr>
+        <p:spPr>
+          <a:xfrm>
+            <a:off x="6484938" y="1244600"/>
+            <a:ext cx="6350" cy="4279900"/>
+          </a:xfrm>
+          <a:prstGeom prst="rect">
+            <a:avLst/>
+          </a:prstGeom>
+          <a:solidFill>
+            <a:srgbClr val="E0E0E0"/>
+          </a:solidFill>
+          <a:ln w="0">
+            <a:noFill/>
+          </a:ln>
+        </p:spPr>
+        <p:txBody>
+          <a:bodyPr/>
+          <a:lstStyle/>
+          <a:p>
+            <a:endParaRPr lang="fr-FR"/>
+          </a:p>
+        </p:txBody>
+      </p:sp>
+      <p:sp>
+        <p:nvSpPr>
+          <p:cNvPr id="119" name="D"/>
+          <p:cNvSpPr/>
+          <p:nvPr/>
+        </p:nvSpPr>
+        <p:spPr>
+          <a:xfrm>
+            <a:off x="6180138" y="5575300"/>
+            <a:ext cx="635000" cy="177800"/>
+          </a:xfrm>
+          <a:prstGeom prst="rect">
+            <a:avLst/>
+          </a:prstGeom>
+          <a:noFill/>
+          <a:ln w="0">
+            <a:noFill/>
+          </a:ln>
+        </p:spPr>
+        <p:txBody>
+          <a:bodyPr wrap="square" lIns="0" tIns="0" rIns="0" bIns="0" anchor="ctr"/>
+          <a:lstStyle/>
+          <a:p>
+            <a:pPr algn="ctr"/>
+            <a:r>
+              <a:rPr lang="fr-FR" sz="700" dirty="0">
+                <a:solidFill>
+                  <a:srgbClr val="6B6B7B"/>
+                </a:solidFill>
+                <a:latin typeface="Inter"/>
+              </a:rPr>
+              <a:t>Apr 02</a:t>
+            </a:r>
+          </a:p>
+        </p:txBody>
+      </p:sp>
+      <p:sp>
+        <p:nvSpPr>
+          <p:cNvPr id="120" name="G"/>
+          <p:cNvSpPr/>
+          <p:nvPr/>
+        </p:nvSpPr>
+        <p:spPr>
+          <a:xfrm>
+            <a:off x="7008813" y="1244600"/>
+            <a:ext cx="6350" cy="4279900"/>
+          </a:xfrm>
+          <a:prstGeom prst="rect">
+            <a:avLst/>
+          </a:prstGeom>
+          <a:solidFill>
+            <a:srgbClr val="E0E0E0"/>
+          </a:solidFill>
+          <a:ln w="0">
+            <a:noFill/>
+          </a:ln>
+        </p:spPr>
+        <p:txBody>
+          <a:bodyPr/>
+          <a:lstStyle/>
+          <a:p>
+            <a:endParaRPr lang="fr-FR"/>
+          </a:p>
+        </p:txBody>
+      </p:sp>
+      <p:sp>
+        <p:nvSpPr>
+          <p:cNvPr id="121" name="D"/>
+          <p:cNvSpPr/>
+          <p:nvPr/>
+        </p:nvSpPr>
+        <p:spPr>
+          <a:xfrm>
+            <a:off x="6704013" y="5575300"/>
+            <a:ext cx="635000" cy="177800"/>
+          </a:xfrm>
+          <a:prstGeom prst="rect">
+            <a:avLst/>
+          </a:prstGeom>
+          <a:noFill/>
+          <a:ln w="0">
+            <a:noFill/>
+          </a:ln>
+        </p:spPr>
+        <p:txBody>
+          <a:bodyPr wrap="square" lIns="0" tIns="0" rIns="0" bIns="0" anchor="ctr"/>
+          <a:lstStyle/>
+          <a:p>
+            <a:pPr algn="ctr"/>
+            <a:r>
+              <a:rPr lang="fr-FR" sz="700" dirty="0">
+                <a:solidFill>
+                  <a:srgbClr val="6B6B7B"/>
+                </a:solidFill>
+                <a:latin typeface="Inter"/>
+              </a:rPr>
+              <a:t>Apr 04</a:t>
+            </a:r>
+          </a:p>
+        </p:txBody>
+      </p:sp>
+      <p:sp>
+        <p:nvSpPr>
+          <p:cNvPr id="122" name="G"/>
+          <p:cNvSpPr/>
+          <p:nvPr/>
+        </p:nvSpPr>
+        <p:spPr>
+          <a:xfrm>
+            <a:off x="7532688" y="1244600"/>
+            <a:ext cx="6350" cy="4279900"/>
+          </a:xfrm>
+          <a:prstGeom prst="rect">
+            <a:avLst/>
+          </a:prstGeom>
+          <a:solidFill>
+            <a:srgbClr val="E0E0E0"/>
+          </a:solidFill>
+          <a:ln w="0">
+            <a:noFill/>
+          </a:ln>
+        </p:spPr>
+        <p:txBody>
+          <a:bodyPr/>
+          <a:lstStyle/>
+          <a:p>
+            <a:endParaRPr lang="fr-FR"/>
+          </a:p>
+        </p:txBody>
+      </p:sp>
+      <p:sp>
+        <p:nvSpPr>
+          <p:cNvPr id="123" name="D"/>
+          <p:cNvSpPr/>
+          <p:nvPr/>
+        </p:nvSpPr>
+        <p:spPr>
+          <a:xfrm>
+            <a:off x="7227888" y="5575300"/>
+            <a:ext cx="635000" cy="177800"/>
+          </a:xfrm>
+          <a:prstGeom prst="rect">
+            <a:avLst/>
+          </a:prstGeom>
+          <a:noFill/>
+          <a:ln w="0">
+            <a:noFill/>
+          </a:ln>
+        </p:spPr>
+        <p:txBody>
+          <a:bodyPr wrap="square" lIns="0" tIns="0" rIns="0" bIns="0" anchor="ctr"/>
+          <a:lstStyle/>
+          <a:p>
+            <a:pPr algn="ctr"/>
+            <a:r>
+              <a:rPr lang="fr-FR" sz="700" dirty="0">
+                <a:solidFill>
+                  <a:srgbClr val="6B6B7B"/>
+                </a:solidFill>
+                <a:latin typeface="Inter"/>
+              </a:rPr>
+              <a:t>Apr 06</a:t>
+            </a:r>
+          </a:p>
+        </p:txBody>
+      </p:sp>
+      <p:sp>
+        <p:nvSpPr>
+          <p:cNvPr id="124" name="G"/>
+          <p:cNvSpPr/>
+          <p:nvPr/>
+        </p:nvSpPr>
+        <p:spPr>
+          <a:xfrm>
+            <a:off x="8056563" y="1244600"/>
+            <a:ext cx="6350" cy="4279900"/>
+          </a:xfrm>
+          <a:prstGeom prst="rect">
+            <a:avLst/>
+          </a:prstGeom>
+          <a:solidFill>
+            <a:srgbClr val="E0E0E0"/>
+          </a:solidFill>
+          <a:ln w="0">
+            <a:noFill/>
+          </a:ln>
+        </p:spPr>
+        <p:txBody>
+          <a:bodyPr/>
+          <a:lstStyle/>
+          <a:p>
+            <a:endParaRPr lang="fr-FR"/>
+          </a:p>
+        </p:txBody>
+      </p:sp>
+      <p:sp>
+        <p:nvSpPr>
+          <p:cNvPr id="125" name="D"/>
+          <p:cNvSpPr/>
+          <p:nvPr/>
+        </p:nvSpPr>
+        <p:spPr>
+          <a:xfrm>
+            <a:off x="7751763" y="5575300"/>
+            <a:ext cx="635000" cy="177800"/>
+          </a:xfrm>
+          <a:prstGeom prst="rect">
+            <a:avLst/>
+          </a:prstGeom>
+          <a:noFill/>
+          <a:ln w="0">
+            <a:noFill/>
+          </a:ln>
+        </p:spPr>
+        <p:txBody>
+          <a:bodyPr wrap="square" lIns="0" tIns="0" rIns="0" bIns="0" anchor="ctr"/>
+          <a:lstStyle/>
+          <a:p>
+            <a:pPr algn="ctr"/>
+            <a:r>
+              <a:rPr lang="fr-FR" sz="700" dirty="0">
+                <a:solidFill>
+                  <a:srgbClr val="6B6B7B"/>
+                </a:solidFill>
+                <a:latin typeface="Inter"/>
+              </a:rPr>
+              <a:t>Apr 08</a:t>
+            </a:r>
+          </a:p>
+        </p:txBody>
+      </p:sp>
+      <p:sp>
+        <p:nvSpPr>
+          <p:cNvPr id="126" name="G"/>
+          <p:cNvSpPr/>
+          <p:nvPr/>
+        </p:nvSpPr>
+        <p:spPr>
+          <a:xfrm>
+            <a:off x="8580438" y="1244600"/>
+            <a:ext cx="6350" cy="4279900"/>
+          </a:xfrm>
+          <a:prstGeom prst="rect">
+            <a:avLst/>
+          </a:prstGeom>
+          <a:solidFill>
+            <a:srgbClr val="E0E0E0"/>
+          </a:solidFill>
+          <a:ln w="0">
+            <a:noFill/>
+          </a:ln>
+        </p:spPr>
+        <p:txBody>
+          <a:bodyPr/>
+          <a:lstStyle/>
+          <a:p>
+            <a:endParaRPr lang="fr-FR"/>
+          </a:p>
+        </p:txBody>
+      </p:sp>
+      <p:sp>
+        <p:nvSpPr>
+          <p:cNvPr id="127" name="D"/>
+          <p:cNvSpPr/>
+          <p:nvPr/>
+        </p:nvSpPr>
+        <p:spPr>
+          <a:xfrm>
+            <a:off x="8275638" y="5575300"/>
+            <a:ext cx="635000" cy="177800"/>
+          </a:xfrm>
+          <a:prstGeom prst="rect">
+            <a:avLst/>
+          </a:prstGeom>
+          <a:noFill/>
+          <a:ln w="0">
+            <a:noFill/>
+          </a:ln>
+        </p:spPr>
+        <p:txBody>
+          <a:bodyPr wrap="square" lIns="0" tIns="0" rIns="0" bIns="0" anchor="ctr"/>
+          <a:lstStyle/>
+          <a:p>
+            <a:pPr algn="ctr"/>
+            <a:r>
+              <a:rPr lang="fr-FR" sz="700" dirty="0">
+                <a:solidFill>
+                  <a:srgbClr val="6B6B7B"/>
+                </a:solidFill>
+                <a:latin typeface="Inter"/>
+              </a:rPr>
+              <a:t>Apr 10</a:t>
+            </a:r>
+          </a:p>
+        </p:txBody>
+      </p:sp>
+      <p:sp>
+        <p:nvSpPr>
+          <p:cNvPr id="128" name="G"/>
+          <p:cNvSpPr/>
+          <p:nvPr/>
+        </p:nvSpPr>
+        <p:spPr>
+          <a:xfrm>
+            <a:off x="9104313" y="1244600"/>
+            <a:ext cx="6350" cy="4279900"/>
+          </a:xfrm>
+          <a:prstGeom prst="rect">
+            <a:avLst/>
+          </a:prstGeom>
+          <a:solidFill>
+            <a:srgbClr val="E0E0E0"/>
+          </a:solidFill>
+          <a:ln w="0">
+            <a:noFill/>
+          </a:ln>
+        </p:spPr>
+        <p:txBody>
+          <a:bodyPr/>
+          <a:lstStyle/>
+          <a:p>
+            <a:endParaRPr lang="fr-FR"/>
+          </a:p>
+        </p:txBody>
+      </p:sp>
+      <p:sp>
+        <p:nvSpPr>
+          <p:cNvPr id="129" name="D"/>
+          <p:cNvSpPr/>
+          <p:nvPr/>
+        </p:nvSpPr>
+        <p:spPr>
+          <a:xfrm>
+            <a:off x="8799513" y="5575300"/>
+            <a:ext cx="635000" cy="177800"/>
+          </a:xfrm>
+          <a:prstGeom prst="rect">
+            <a:avLst/>
+          </a:prstGeom>
+          <a:noFill/>
+          <a:ln w="0">
+            <a:noFill/>
+          </a:ln>
+        </p:spPr>
+        <p:txBody>
+          <a:bodyPr wrap="square" lIns="0" tIns="0" rIns="0" bIns="0" anchor="ctr"/>
+          <a:lstStyle/>
+          <a:p>
+            <a:pPr algn="ctr"/>
+            <a:r>
+              <a:rPr lang="fr-FR" sz="700" dirty="0">
+                <a:solidFill>
+                  <a:srgbClr val="6B6B7B"/>
+                </a:solidFill>
+                <a:latin typeface="Inter"/>
+              </a:rPr>
+              <a:t>Apr 12</a:t>
+            </a:r>
+          </a:p>
+        </p:txBody>
+      </p:sp>
+      <p:sp>
+        <p:nvSpPr>
+          <p:cNvPr id="130" name="G"/>
+          <p:cNvSpPr/>
+          <p:nvPr/>
+        </p:nvSpPr>
+        <p:spPr>
+          <a:xfrm>
+            <a:off x="9628188" y="1244600"/>
+            <a:ext cx="6350" cy="4279900"/>
+          </a:xfrm>
+          <a:prstGeom prst="rect">
+            <a:avLst/>
+          </a:prstGeom>
+          <a:solidFill>
+            <a:srgbClr val="E0E0E0"/>
+          </a:solidFill>
+          <a:ln w="0">
+            <a:noFill/>
+          </a:ln>
+        </p:spPr>
+        <p:txBody>
+          <a:bodyPr/>
+          <a:lstStyle/>
+          <a:p>
+            <a:endParaRPr lang="fr-FR"/>
+          </a:p>
+        </p:txBody>
+      </p:sp>
+      <p:sp>
+        <p:nvSpPr>
+          <p:cNvPr id="131" name="D"/>
+          <p:cNvSpPr/>
+          <p:nvPr/>
+        </p:nvSpPr>
+        <p:spPr>
+          <a:xfrm>
+            <a:off x="9323388" y="5575300"/>
+            <a:ext cx="635000" cy="177800"/>
+          </a:xfrm>
+          <a:prstGeom prst="rect">
+            <a:avLst/>
+          </a:prstGeom>
+          <a:noFill/>
+          <a:ln w="0">
+            <a:noFill/>
+          </a:ln>
+        </p:spPr>
+        <p:txBody>
+          <a:bodyPr wrap="square" lIns="0" tIns="0" rIns="0" bIns="0" anchor="ctr"/>
+          <a:lstStyle/>
+          <a:p>
+            <a:pPr algn="ctr"/>
+            <a:r>
+              <a:rPr lang="fr-FR" sz="700" dirty="0">
+                <a:solidFill>
+                  <a:srgbClr val="6B6B7B"/>
+                </a:solidFill>
+                <a:latin typeface="Inter"/>
+              </a:rPr>
+              <a:t>Apr 14</a:t>
+            </a:r>
+          </a:p>
+        </p:txBody>
+      </p:sp>
+      <p:sp>
+        <p:nvSpPr>
+          <p:cNvPr id="132" name="BG"/>
+          <p:cNvSpPr/>
+          <p:nvPr/>
+        </p:nvSpPr>
+        <p:spPr>
+          <a:xfrm>
+            <a:off x="698500" y="1257300"/>
+            <a:ext cx="11112500" cy="876300"/>
+          </a:xfrm>
+          <a:prstGeom prst="rect">
+            <a:avLst/>
+          </a:prstGeom>
+          <a:solidFill>
+            <a:srgbClr val="EEEEF6">
+              <a:alpha val="35000"/>
+            </a:srgbClr>
+          </a:solidFill>
+          <a:ln w="0">
+            <a:noFill/>
+          </a:ln>
+        </p:spPr>
+        <p:txBody>
+          <a:bodyPr/>
+          <a:lstStyle/>
+          <a:p>
+            <a:endParaRPr lang="fr-FR"/>
+          </a:p>
+        </p:txBody>
+      </p:sp>
+      <p:sp>
+        <p:nvSpPr>
+          <p:cNvPr id="133" name="CL"/>
+          <p:cNvSpPr/>
+          <p:nvPr/>
+        </p:nvSpPr>
+        <p:spPr>
+          <a:xfrm>
+            <a:off x="749300" y="1593850"/>
+            <a:ext cx="1270000" cy="228600"/>
+          </a:xfrm>
+          <a:prstGeom prst="rect">
+            <a:avLst/>
+          </a:prstGeom>
+          <a:noFill/>
+          <a:ln w="0">
+            <a:noFill/>
+          </a:ln>
+        </p:spPr>
+        <p:txBody>
+          <a:bodyPr wrap="square" lIns="0" tIns="0" rIns="0" bIns="0" anchor="ctr"/>
+          <a:lstStyle/>
+          <a:p>
+            <a:pPr algn="l"/>
+            <a:r>
+              <a:rPr lang="fr-FR" sz="900" b="1" dirty="0">
+                <a:solidFill>
+                  <a:srgbClr val="1A1A2E"/>
+                </a:solidFill>
+                <a:latin typeface="Inter"/>
+              </a:rPr>
+              <a:t>Go Services</a:t>
+            </a:r>
+          </a:p>
+        </p:txBody>
+      </p:sp>
+      <p:sp>
+        <p:nvSpPr>
+          <p:cNvPr id="134" name="B"/>
+          <p:cNvSpPr/>
+          <p:nvPr/>
+        </p:nvSpPr>
+        <p:spPr>
+          <a:xfrm>
+            <a:off x="2293938" y="1320800"/>
+            <a:ext cx="1047750" cy="177800"/>
+          </a:xfrm>
+          <a:prstGeom prst="roundRect">
+            <a:avLst>
+              <a:gd name="adj" fmla="val 30000"/>
+            </a:avLst>
+          </a:prstGeom>
+          <a:solidFill>
+            <a:srgbClr val="7B83C1"/>
+          </a:solidFill>
+          <a:ln w="0">
+            <a:noFill/>
+          </a:ln>
+        </p:spPr>
+        <p:txBody>
+          <a:bodyPr/>
+          <a:lstStyle/>
+          <a:p>
+            <a:endParaRPr lang="fr-FR"/>
+          </a:p>
+        </p:txBody>
+      </p:sp>
+      <p:sp>
+        <p:nvSpPr>
+          <p:cNvPr id="135" name="L"/>
+          <p:cNvSpPr/>
+          <p:nvPr/>
+        </p:nvSpPr>
+        <p:spPr>
+          <a:xfrm>
+            <a:off x="3392488" y="1320800"/>
+            <a:ext cx="2540000" cy="177800"/>
+          </a:xfrm>
+          <a:prstGeom prst="rect">
+            <a:avLst/>
+          </a:prstGeom>
+          <a:noFill/>
+          <a:ln w="0">
+            <a:noFill/>
+          </a:ln>
+        </p:spPr>
+        <p:txBody>
+          <a:bodyPr wrap="square" lIns="0" tIns="0" rIns="0" bIns="0" anchor="ctr"/>
+          <a:lstStyle/>
+          <a:p>
+            <a:pPr algn="l"/>
+            <a:r>
+              <a:rPr lang="fr-FR" sz="800" dirty="0">
+                <a:solidFill>
+                  <a:srgbClr val="1A1A2E"/>
+                </a:solidFill>
+                <a:latin typeface="Inter"/>
+              </a:rPr>
+              <a:t>SRM &amp; WMS services</a:t>
+            </a:r>
+          </a:p>
+        </p:txBody>
+      </p:sp>
+      <p:sp>
+        <p:nvSpPr>
+          <p:cNvPr id="136" name="B"/>
+          <p:cNvSpPr/>
+          <p:nvPr/>
+        </p:nvSpPr>
+        <p:spPr>
+          <a:xfrm>
+            <a:off x="2817813" y="1612900"/>
+            <a:ext cx="1309688" cy="177800"/>
+          </a:xfrm>
+          <a:prstGeom prst="roundRect">
+            <a:avLst>
+              <a:gd name="adj" fmla="val 30000"/>
+            </a:avLst>
+          </a:prstGeom>
+          <a:solidFill>
+            <a:srgbClr val="7B83C1"/>
+          </a:solidFill>
+          <a:ln w="0">
+            <a:noFill/>
+          </a:ln>
+        </p:spPr>
+        <p:txBody>
+          <a:bodyPr/>
+          <a:lstStyle/>
+          <a:p>
+            <a:endParaRPr lang="fr-FR"/>
+          </a:p>
+        </p:txBody>
+      </p:sp>
+      <p:sp>
+        <p:nvSpPr>
+          <p:cNvPr id="137" name="L"/>
+          <p:cNvSpPr/>
+          <p:nvPr/>
+        </p:nvSpPr>
+        <p:spPr>
+          <a:xfrm>
+            <a:off x="4178300" y="1612900"/>
+            <a:ext cx="2540000" cy="177800"/>
+          </a:xfrm>
+          <a:prstGeom prst="rect">
+            <a:avLst/>
+          </a:prstGeom>
+          <a:noFill/>
+          <a:ln w="0">
+            <a:noFill/>
+          </a:ln>
+        </p:spPr>
+        <p:txBody>
+          <a:bodyPr wrap="square" lIns="0" tIns="0" rIns="0" bIns="0" anchor="ctr"/>
+          <a:lstStyle/>
+          <a:p>
+            <a:pPr algn="l"/>
+            <a:r>
+              <a:rPr lang="fr-FR" sz="800" dirty="0">
+                <a:solidFill>
+                  <a:srgbClr val="1A1A2E"/>
+                </a:solidFill>
+                <a:latin typeface="Inter"/>
+              </a:rPr>
+              <a:t>OMS &amp; TMS services</a:t>
+            </a:r>
+          </a:p>
+        </p:txBody>
+      </p:sp>
+      <p:sp>
+        <p:nvSpPr>
+          <p:cNvPr id="138" name="B"/>
+          <p:cNvSpPr/>
+          <p:nvPr/>
+        </p:nvSpPr>
+        <p:spPr>
+          <a:xfrm>
+            <a:off x="3603625" y="1905000"/>
+            <a:ext cx="1047750" cy="177800"/>
+          </a:xfrm>
+          <a:prstGeom prst="roundRect">
+            <a:avLst>
+              <a:gd name="adj" fmla="val 30000"/>
+            </a:avLst>
+          </a:prstGeom>
+          <a:solidFill>
+            <a:srgbClr val="7B83C1"/>
+          </a:solidFill>
+          <a:ln w="0">
+            <a:noFill/>
+          </a:ln>
+        </p:spPr>
+        <p:txBody>
+          <a:bodyPr/>
+          <a:lstStyle/>
+          <a:p>
+            <a:endParaRPr lang="fr-FR"/>
+          </a:p>
+        </p:txBody>
+      </p:sp>
+      <p:sp>
+        <p:nvSpPr>
+          <p:cNvPr id="139" name="L"/>
+          <p:cNvSpPr/>
+          <p:nvPr/>
+        </p:nvSpPr>
+        <p:spPr>
+          <a:xfrm>
+            <a:off x="4702175" y="1905000"/>
+            <a:ext cx="2540000" cy="177800"/>
+          </a:xfrm>
+          <a:prstGeom prst="rect">
+            <a:avLst/>
+          </a:prstGeom>
+          <a:noFill/>
+          <a:ln w="0">
+            <a:noFill/>
+          </a:ln>
+        </p:spPr>
+        <p:txBody>
+          <a:bodyPr wrap="square" lIns="0" tIns="0" rIns="0" bIns="0" anchor="ctr"/>
+          <a:lstStyle/>
+          <a:p>
+            <a:pPr algn="l"/>
+            <a:r>
+              <a:rPr lang="fr-FR" sz="800" dirty="0">
+                <a:solidFill>
+                  <a:srgbClr val="1A1A2E"/>
+                </a:solidFill>
+                <a:latin typeface="Inter"/>
+              </a:rPr>
+              <a:t>Seed data</a:t>
+            </a:r>
+          </a:p>
+        </p:txBody>
+      </p:sp>
+      <p:sp>
+        <p:nvSpPr>
+          <p:cNvPr id="140" name="BG"/>
+          <p:cNvSpPr/>
+          <p:nvPr/>
+        </p:nvSpPr>
+        <p:spPr>
+          <a:xfrm>
+            <a:off x="698500" y="2171700"/>
+            <a:ext cx="11112500" cy="584200"/>
+          </a:xfrm>
+          <a:prstGeom prst="rect">
+            <a:avLst/>
+          </a:prstGeom>
+          <a:solidFill>
+            <a:srgbClr val="EEEEF6">
+              <a:alpha val="35000"/>
+            </a:srgbClr>
+          </a:solidFill>
+          <a:ln w="0">
+            <a:noFill/>
+          </a:ln>
+        </p:spPr>
+        <p:txBody>
+          <a:bodyPr/>
+          <a:lstStyle/>
+          <a:p>
+            <a:endParaRPr lang="fr-FR"/>
+          </a:p>
+        </p:txBody>
+      </p:sp>
+      <p:sp>
+        <p:nvSpPr>
+          <p:cNvPr id="141" name="CL"/>
+          <p:cNvSpPr/>
+          <p:nvPr/>
+        </p:nvSpPr>
+        <p:spPr>
+          <a:xfrm>
+            <a:off x="749300" y="2362200"/>
+            <a:ext cx="1270000" cy="228600"/>
+          </a:xfrm>
+          <a:prstGeom prst="rect">
+            <a:avLst/>
+          </a:prstGeom>
+          <a:noFill/>
+          <a:ln w="0">
+            <a:noFill/>
+          </a:ln>
+        </p:spPr>
+        <p:txBody>
+          <a:bodyPr wrap="square" lIns="0" tIns="0" rIns="0" bIns="0" anchor="ctr"/>
+          <a:lstStyle/>
+          <a:p>
+            <a:pPr algn="l"/>
+            <a:r>
+              <a:rPr lang="fr-FR" sz="900" b="1" dirty="0">
+                <a:solidFill>
+                  <a:srgbClr val="1A1A2E"/>
+                </a:solidFill>
+                <a:latin typeface="Inter"/>
+              </a:rPr>
+              <a:t>MCP Layer</a:t>
+            </a:r>
+          </a:p>
+        </p:txBody>
+      </p:sp>
+      <p:sp>
+        <p:nvSpPr>
+          <p:cNvPr id="142" name="B"/>
+          <p:cNvSpPr/>
+          <p:nvPr/>
+        </p:nvSpPr>
+        <p:spPr>
+          <a:xfrm>
+            <a:off x="4127500" y="2235200"/>
+            <a:ext cx="1309688" cy="177800"/>
+          </a:xfrm>
+          <a:prstGeom prst="roundRect">
+            <a:avLst>
+              <a:gd name="adj" fmla="val 30000"/>
+            </a:avLst>
+          </a:prstGeom>
+          <a:solidFill>
+            <a:srgbClr val="7B83C1"/>
+          </a:solidFill>
+          <a:ln w="0">
+            <a:noFill/>
+          </a:ln>
+        </p:spPr>
+        <p:txBody>
+          <a:bodyPr/>
+          <a:lstStyle/>
+          <a:p>
+            <a:endParaRPr lang="fr-FR"/>
+          </a:p>
+        </p:txBody>
+      </p:sp>
+      <p:sp>
+        <p:nvSpPr>
+          <p:cNvPr id="143" name="L"/>
+          <p:cNvSpPr/>
+          <p:nvPr/>
+        </p:nvSpPr>
+        <p:spPr>
+          <a:xfrm>
+            <a:off x="5487988" y="2235200"/>
+            <a:ext cx="2540000" cy="177800"/>
+          </a:xfrm>
+          <a:prstGeom prst="rect">
+            <a:avLst/>
+          </a:prstGeom>
+          <a:noFill/>
+          <a:ln w="0">
+            <a:noFill/>
+          </a:ln>
+        </p:spPr>
+        <p:txBody>
+          <a:bodyPr wrap="square" lIns="0" tIns="0" rIns="0" bIns="0" anchor="ctr"/>
+          <a:lstStyle/>
+          <a:p>
+            <a:pPr algn="l"/>
+            <a:r>
+              <a:rPr lang="fr-FR" sz="800" dirty="0">
+                <a:solidFill>
+                  <a:srgbClr val="1A1A2E"/>
+                </a:solidFill>
+                <a:latin typeface="Inter"/>
+              </a:rPr>
+              <a:t>MCP tool registration</a:t>
+            </a:r>
+          </a:p>
+        </p:txBody>
+      </p:sp>
+      <p:sp>
+        <p:nvSpPr>
+          <p:cNvPr id="144" name="B"/>
+          <p:cNvSpPr/>
+          <p:nvPr/>
+        </p:nvSpPr>
+        <p:spPr>
+          <a:xfrm>
+            <a:off x="5699125" y="2527300"/>
+            <a:ext cx="1047750" cy="177800"/>
+          </a:xfrm>
+          <a:prstGeom prst="roundRect">
+            <a:avLst>
+              <a:gd name="adj" fmla="val 30000"/>
+            </a:avLst>
+          </a:prstGeom>
+          <a:solidFill>
+            <a:srgbClr val="7B83C1"/>
+          </a:solidFill>
+          <a:ln w="0">
+            <a:noFill/>
+          </a:ln>
+        </p:spPr>
+        <p:txBody>
+          <a:bodyPr/>
+          <a:lstStyle/>
+          <a:p>
+            <a:endParaRPr lang="fr-FR"/>
+          </a:p>
+        </p:txBody>
+      </p:sp>
+      <p:sp>
+        <p:nvSpPr>
+          <p:cNvPr id="145" name="L"/>
+          <p:cNvSpPr/>
+          <p:nvPr/>
+        </p:nvSpPr>
+        <p:spPr>
+          <a:xfrm>
+            <a:off x="6797675" y="2527300"/>
+            <a:ext cx="2540000" cy="177800"/>
+          </a:xfrm>
+          <a:prstGeom prst="rect">
+            <a:avLst/>
+          </a:prstGeom>
+          <a:noFill/>
+          <a:ln w="0">
+            <a:noFill/>
+          </a:ln>
+        </p:spPr>
+        <p:txBody>
+          <a:bodyPr wrap="square" lIns="0" tIns="0" rIns="0" bIns="0" anchor="ctr"/>
+          <a:lstStyle/>
+          <a:p>
+            <a:pPr algn="l"/>
+            <a:r>
+              <a:rPr lang="fr-FR" sz="800" dirty="0">
+                <a:solidFill>
+                  <a:srgbClr val="1A1A2E"/>
+                </a:solidFill>
+                <a:latin typeface="Inter"/>
+              </a:rPr>
+              <a:t>Tool testing</a:t>
+            </a:r>
+          </a:p>
+        </p:txBody>
+      </p:sp>
+      <p:sp>
+        <p:nvSpPr>
+          <p:cNvPr id="146" name="BG"/>
+          <p:cNvSpPr/>
+          <p:nvPr/>
+        </p:nvSpPr>
+        <p:spPr>
+          <a:xfrm>
+            <a:off x="698500" y="2794000"/>
+            <a:ext cx="11112500" cy="584200"/>
+          </a:xfrm>
+          <a:prstGeom prst="rect">
+            <a:avLst/>
+          </a:prstGeom>
+          <a:solidFill>
+            <a:srgbClr val="FFF9C4">
+              <a:alpha val="70000"/>
+            </a:srgbClr>
+          </a:solidFill>
+          <a:ln w="0">
+            <a:noFill/>
+          </a:ln>
+        </p:spPr>
+        <p:txBody>
+          <a:bodyPr/>
+          <a:lstStyle/>
+          <a:p>
+            <a:endParaRPr lang="fr-FR"/>
+          </a:p>
+        </p:txBody>
+      </p:sp>
+      <p:sp>
+        <p:nvSpPr>
+          <p:cNvPr id="147" name="CL"/>
+          <p:cNvSpPr/>
+          <p:nvPr/>
+        </p:nvSpPr>
+        <p:spPr>
+          <a:xfrm>
+            <a:off x="749300" y="2984500"/>
+            <a:ext cx="1270000" cy="228600"/>
+          </a:xfrm>
+          <a:prstGeom prst="rect">
+            <a:avLst/>
+          </a:prstGeom>
+          <a:noFill/>
+          <a:ln w="0">
+            <a:noFill/>
+          </a:ln>
+        </p:spPr>
+        <p:txBody>
+          <a:bodyPr wrap="square" lIns="0" tIns="0" rIns="0" bIns="0" anchor="ctr"/>
+          <a:lstStyle/>
+          <a:p>
+            <a:pPr algn="l"/>
+            <a:r>
+              <a:rPr lang="fr-FR" sz="900" b="1" dirty="0">
+                <a:solidFill>
+                  <a:srgbClr val="1A1A2E"/>
+                </a:solidFill>
+                <a:latin typeface="Inter"/>
+              </a:rPr>
+              <a:t>Agent</a:t>
+            </a:r>
+          </a:p>
+        </p:txBody>
+      </p:sp>
+      <p:sp>
+        <p:nvSpPr>
+          <p:cNvPr id="148" name="B"/>
+          <p:cNvSpPr/>
+          <p:nvPr/>
+        </p:nvSpPr>
+        <p:spPr>
+          <a:xfrm>
+            <a:off x="5699125" y="2857500"/>
+            <a:ext cx="1309688" cy="177800"/>
+          </a:xfrm>
+          <a:prstGeom prst="roundRect">
+            <a:avLst>
+              <a:gd name="adj" fmla="val 30000"/>
+            </a:avLst>
+          </a:prstGeom>
+          <a:solidFill>
+            <a:srgbClr val="7B83C1"/>
+          </a:solidFill>
+          <a:ln w="0">
+            <a:noFill/>
+          </a:ln>
+        </p:spPr>
+        <p:txBody>
+          <a:bodyPr/>
+          <a:lstStyle/>
+          <a:p>
+            <a:endParaRPr lang="fr-FR"/>
+          </a:p>
+        </p:txBody>
+      </p:sp>
+      <p:sp>
+        <p:nvSpPr>
+          <p:cNvPr id="149" name="L"/>
+          <p:cNvSpPr/>
+          <p:nvPr/>
+        </p:nvSpPr>
+        <p:spPr>
+          <a:xfrm>
+            <a:off x="7059613" y="2857500"/>
+            <a:ext cx="2540000" cy="177800"/>
+          </a:xfrm>
+          <a:prstGeom prst="rect">
+            <a:avLst/>
+          </a:prstGeom>
+          <a:noFill/>
+          <a:ln w="0">
+            <a:noFill/>
+          </a:ln>
+        </p:spPr>
+        <p:txBody>
+          <a:bodyPr wrap="square" lIns="0" tIns="0" rIns="0" bIns="0" anchor="ctr"/>
+          <a:lstStyle/>
+          <a:p>
+            <a:pPr algn="l"/>
+            <a:r>
+              <a:rPr lang="fr-FR" sz="800" dirty="0">
+                <a:solidFill>
+                  <a:srgbClr val="1A1A2E"/>
+                </a:solidFill>
+                <a:latin typeface="Inter"/>
+              </a:rPr>
+              <a:t>Project folder &amp; CLAUDE.md</a:t>
+            </a:r>
+          </a:p>
+        </p:txBody>
+      </p:sp>
+      <p:sp>
+        <p:nvSpPr>
+          <p:cNvPr id="150" name="B"/>
+          <p:cNvSpPr/>
+          <p:nvPr/>
+        </p:nvSpPr>
+        <p:spPr>
+          <a:xfrm>
+            <a:off x="6223000" y="3149600"/>
+            <a:ext cx="1309688" cy="177800"/>
+          </a:xfrm>
+          <a:prstGeom prst="roundRect">
+            <a:avLst>
+              <a:gd name="adj" fmla="val 30000"/>
+            </a:avLst>
+          </a:prstGeom>
+          <a:solidFill>
+            <a:srgbClr val="7B83C1"/>
+          </a:solidFill>
+          <a:ln w="0">
+            <a:noFill/>
+          </a:ln>
+        </p:spPr>
+        <p:txBody>
+          <a:bodyPr/>
+          <a:lstStyle/>
+          <a:p>
+            <a:endParaRPr lang="fr-FR"/>
+          </a:p>
+        </p:txBody>
+      </p:sp>
+      <p:sp>
+        <p:nvSpPr>
+          <p:cNvPr id="151" name="L"/>
+          <p:cNvSpPr/>
+          <p:nvPr/>
+        </p:nvSpPr>
+        <p:spPr>
+          <a:xfrm>
+            <a:off x="7583488" y="3149600"/>
+            <a:ext cx="2540000" cy="177800"/>
+          </a:xfrm>
+          <a:prstGeom prst="rect">
+            <a:avLst/>
+          </a:prstGeom>
+          <a:noFill/>
+          <a:ln w="0">
+            <a:noFill/>
+          </a:ln>
+        </p:spPr>
+        <p:txBody>
+          <a:bodyPr wrap="square" lIns="0" tIns="0" rIns="0" bIns="0" anchor="ctr"/>
+          <a:lstStyle/>
+          <a:p>
+            <a:pPr algn="l"/>
+            <a:r>
+              <a:rPr lang="fr-FR" sz="800" dirty="0">
+                <a:solidFill>
+                  <a:srgbClr val="1A1A2E"/>
+                </a:solidFill>
+                <a:latin typeface="Inter"/>
+              </a:rPr>
+              <a:t>Skills &amp; integration test</a:t>
+            </a:r>
+          </a:p>
+        </p:txBody>
+      </p:sp>
+      <p:sp>
+        <p:nvSpPr>
+          <p:cNvPr id="152" name="BG"/>
+          <p:cNvSpPr/>
+          <p:nvPr/>
+        </p:nvSpPr>
+        <p:spPr>
+          <a:xfrm>
+            <a:off x="698500" y="3416300"/>
+            <a:ext cx="11112500" cy="1168400"/>
+          </a:xfrm>
+          <a:prstGeom prst="rect">
+            <a:avLst/>
+          </a:prstGeom>
+          <a:solidFill>
+            <a:srgbClr val="EEEEF6">
+              <a:alpha val="35000"/>
+            </a:srgbClr>
+          </a:solidFill>
+          <a:ln w="0">
+            <a:noFill/>
+          </a:ln>
+        </p:spPr>
+        <p:txBody>
+          <a:bodyPr/>
+          <a:lstStyle/>
+          <a:p>
+            <a:endParaRPr lang="fr-FR"/>
+          </a:p>
+        </p:txBody>
+      </p:sp>
+      <p:sp>
+        <p:nvSpPr>
+          <p:cNvPr id="153" name="CL"/>
+          <p:cNvSpPr/>
+          <p:nvPr/>
+        </p:nvSpPr>
+        <p:spPr>
+          <a:xfrm>
+            <a:off x="749300" y="3898900"/>
+            <a:ext cx="1270000" cy="228600"/>
+          </a:xfrm>
+          <a:prstGeom prst="rect">
+            <a:avLst/>
+          </a:prstGeom>
+          <a:noFill/>
+          <a:ln w="0">
+            <a:noFill/>
+          </a:ln>
+        </p:spPr>
+        <p:txBody>
+          <a:bodyPr wrap="square" lIns="0" tIns="0" rIns="0" bIns="0" anchor="ctr"/>
+          <a:lstStyle/>
+          <a:p>
+            <a:pPr algn="l"/>
+            <a:r>
+              <a:rPr lang="fr-FR" sz="900" b="1" dirty="0">
+                <a:solidFill>
+                  <a:srgbClr val="1A1A2E"/>
+                </a:solidFill>
+                <a:latin typeface="Inter"/>
+              </a:rPr>
+              <a:t>Evaluation</a:t>
+            </a:r>
+          </a:p>
+        </p:txBody>
+      </p:sp>
+      <p:sp>
+        <p:nvSpPr>
+          <p:cNvPr id="154" name="B"/>
+          <p:cNvSpPr/>
+          <p:nvPr/>
+        </p:nvSpPr>
+        <p:spPr>
+          <a:xfrm>
+            <a:off x="4651375" y="3479800"/>
+            <a:ext cx="1833563" cy="177800"/>
+          </a:xfrm>
+          <a:prstGeom prst="roundRect">
+            <a:avLst>
+              <a:gd name="adj" fmla="val 30000"/>
+            </a:avLst>
+          </a:prstGeom>
+          <a:solidFill>
+            <a:srgbClr val="7B83C1"/>
+          </a:solidFill>
+          <a:ln w="0">
+            <a:noFill/>
+          </a:ln>
+        </p:spPr>
+        <p:txBody>
+          <a:bodyPr/>
+          <a:lstStyle/>
+          <a:p>
+            <a:endParaRPr lang="fr-FR"/>
+          </a:p>
+        </p:txBody>
+      </p:sp>
+      <p:sp>
+        <p:nvSpPr>
+          <p:cNvPr id="155" name="L"/>
+          <p:cNvSpPr/>
+          <p:nvPr/>
+        </p:nvSpPr>
+        <p:spPr>
+          <a:xfrm>
+            <a:off x="6535738" y="3479800"/>
+            <a:ext cx="2540000" cy="177800"/>
+          </a:xfrm>
+          <a:prstGeom prst="rect">
+            <a:avLst/>
+          </a:prstGeom>
+          <a:noFill/>
+          <a:ln w="0">
+            <a:noFill/>
+          </a:ln>
+        </p:spPr>
+        <p:txBody>
+          <a:bodyPr wrap="square" lIns="0" tIns="0" rIns="0" bIns="0" anchor="ctr"/>
+          <a:lstStyle/>
+          <a:p>
+            <a:pPr algn="l"/>
+            <a:r>
+              <a:rPr lang="fr-FR" sz="800" dirty="0">
+                <a:solidFill>
+                  <a:srgbClr val="1A1A2E"/>
+                </a:solidFill>
+                <a:latin typeface="Inter"/>
+              </a:rPr>
+              <a:t>Ground truth (15 scenarios)</a:t>
+            </a:r>
+          </a:p>
+        </p:txBody>
+      </p:sp>
+      <p:sp>
+        <p:nvSpPr>
+          <p:cNvPr id="156" name="B"/>
+          <p:cNvSpPr/>
+          <p:nvPr/>
+        </p:nvSpPr>
+        <p:spPr>
+          <a:xfrm>
+            <a:off x="6746875" y="3771900"/>
+            <a:ext cx="1309688" cy="177800"/>
+          </a:xfrm>
+          <a:prstGeom prst="roundRect">
+            <a:avLst>
+              <a:gd name="adj" fmla="val 30000"/>
+            </a:avLst>
+          </a:prstGeom>
+          <a:solidFill>
+            <a:srgbClr val="7B83C1"/>
+          </a:solidFill>
+          <a:ln w="0">
+            <a:noFill/>
+          </a:ln>
+        </p:spPr>
+        <p:txBody>
+          <a:bodyPr/>
+          <a:lstStyle/>
+          <a:p>
+            <a:endParaRPr lang="fr-FR"/>
+          </a:p>
+        </p:txBody>
+      </p:sp>
+      <p:sp>
+        <p:nvSpPr>
+          <p:cNvPr id="157" name="L"/>
+          <p:cNvSpPr/>
+          <p:nvPr/>
+        </p:nvSpPr>
+        <p:spPr>
+          <a:xfrm>
+            <a:off x="8107363" y="3771900"/>
+            <a:ext cx="2540000" cy="177800"/>
+          </a:xfrm>
+          <a:prstGeom prst="rect">
+            <a:avLst/>
+          </a:prstGeom>
+          <a:noFill/>
+          <a:ln w="0">
+            <a:noFill/>
+          </a:ln>
+        </p:spPr>
+        <p:txBody>
+          <a:bodyPr wrap="square" lIns="0" tIns="0" rIns="0" bIns="0" anchor="ctr"/>
+          <a:lstStyle/>
+          <a:p>
+            <a:pPr algn="l"/>
+            <a:r>
+              <a:rPr lang="fr-FR" sz="800" dirty="0">
+                <a:solidFill>
+                  <a:srgbClr val="1A1A2E"/>
+                </a:solidFill>
+                <a:latin typeface="Inter"/>
+              </a:rPr>
+              <a:t>LLM-as-Judge pipeline</a:t>
+            </a:r>
+          </a:p>
+        </p:txBody>
+      </p:sp>
+      <p:sp>
+        <p:nvSpPr>
+          <p:cNvPr id="158" name="B"/>
+          <p:cNvSpPr/>
+          <p:nvPr/>
+        </p:nvSpPr>
+        <p:spPr>
+          <a:xfrm>
+            <a:off x="7532688" y="4064000"/>
+            <a:ext cx="1309688" cy="177800"/>
+          </a:xfrm>
+          <a:prstGeom prst="roundRect">
+            <a:avLst>
+              <a:gd name="adj" fmla="val 30000"/>
+            </a:avLst>
+          </a:prstGeom>
+          <a:solidFill>
+            <a:srgbClr val="7B83C1"/>
+          </a:solidFill>
+          <a:ln w="0">
+            <a:noFill/>
+          </a:ln>
+        </p:spPr>
+        <p:txBody>
+          <a:bodyPr/>
+          <a:lstStyle/>
+          <a:p>
+            <a:endParaRPr lang="fr-FR"/>
+          </a:p>
+        </p:txBody>
+      </p:sp>
+      <p:sp>
+        <p:nvSpPr>
+          <p:cNvPr id="159" name="L"/>
+          <p:cNvSpPr/>
+          <p:nvPr/>
+        </p:nvSpPr>
+        <p:spPr>
+          <a:xfrm>
+            <a:off x="8893175" y="4064000"/>
+            <a:ext cx="2540000" cy="177800"/>
+          </a:xfrm>
+          <a:prstGeom prst="rect">
+            <a:avLst/>
+          </a:prstGeom>
+          <a:noFill/>
+          <a:ln w="0">
+            <a:noFill/>
+          </a:ln>
+        </p:spPr>
+        <p:txBody>
+          <a:bodyPr wrap="square" lIns="0" tIns="0" rIns="0" bIns="0" anchor="ctr"/>
+          <a:lstStyle/>
+          <a:p>
+            <a:pPr algn="l"/>
+            <a:r>
+              <a:rPr lang="fr-FR" sz="800" dirty="0">
+                <a:solidFill>
+                  <a:srgbClr val="1A1A2E"/>
+                </a:solidFill>
+                <a:latin typeface="Inter"/>
+              </a:rPr>
+              <a:t>Evaluation runs (45 runs)</a:t>
+            </a:r>
+          </a:p>
+        </p:txBody>
+      </p:sp>
+      <p:sp>
+        <p:nvSpPr>
+          <p:cNvPr id="160" name="B"/>
+          <p:cNvSpPr/>
+          <p:nvPr/>
+        </p:nvSpPr>
+        <p:spPr>
+          <a:xfrm>
+            <a:off x="8056563" y="4356100"/>
+            <a:ext cx="785813" cy="177800"/>
+          </a:xfrm>
+          <a:prstGeom prst="roundRect">
+            <a:avLst>
+              <a:gd name="adj" fmla="val 30000"/>
+            </a:avLst>
+          </a:prstGeom>
+          <a:solidFill>
+            <a:srgbClr val="7B83C1"/>
+          </a:solidFill>
+          <a:ln w="0">
+            <a:noFill/>
+          </a:ln>
+        </p:spPr>
+        <p:txBody>
+          <a:bodyPr/>
+          <a:lstStyle/>
+          <a:p>
+            <a:endParaRPr lang="fr-FR"/>
+          </a:p>
+        </p:txBody>
+      </p:sp>
+      <p:sp>
+        <p:nvSpPr>
+          <p:cNvPr id="161" name="L"/>
+          <p:cNvSpPr/>
+          <p:nvPr/>
+        </p:nvSpPr>
+        <p:spPr>
+          <a:xfrm>
+            <a:off x="8893175" y="4356100"/>
+            <a:ext cx="2540000" cy="177800"/>
+          </a:xfrm>
+          <a:prstGeom prst="rect">
+            <a:avLst/>
+          </a:prstGeom>
+          <a:noFill/>
+          <a:ln w="0">
+            <a:noFill/>
+          </a:ln>
+        </p:spPr>
+        <p:txBody>
+          <a:bodyPr wrap="square" lIns="0" tIns="0" rIns="0" bIns="0" anchor="ctr"/>
+          <a:lstStyle/>
+          <a:p>
+            <a:pPr algn="l"/>
+            <a:r>
+              <a:rPr lang="fr-FR" sz="800" dirty="0">
+                <a:solidFill>
+                  <a:srgbClr val="1A1A2E"/>
+                </a:solidFill>
+                <a:latin typeface="Inter"/>
+              </a:rPr>
+              <a:t>Results analysis</a:t>
+            </a:r>
+          </a:p>
+        </p:txBody>
+      </p:sp>
+      <p:sp>
+        <p:nvSpPr>
+          <p:cNvPr id="162" name="BG"/>
+          <p:cNvSpPr/>
+          <p:nvPr/>
+        </p:nvSpPr>
+        <p:spPr>
+          <a:xfrm>
+            <a:off x="698500" y="4622800"/>
+            <a:ext cx="11112500" cy="876300"/>
+          </a:xfrm>
+          <a:prstGeom prst="rect">
+            <a:avLst/>
+          </a:prstGeom>
+          <a:solidFill>
+            <a:srgbClr val="EEEEF6">
+              <a:alpha val="35000"/>
+            </a:srgbClr>
+          </a:solidFill>
+          <a:ln w="0">
+            <a:noFill/>
+          </a:ln>
+        </p:spPr>
+        <p:txBody>
+          <a:bodyPr/>
+          <a:lstStyle/>
+          <a:p>
+            <a:endParaRPr lang="fr-FR"/>
+          </a:p>
+        </p:txBody>
+      </p:sp>
+      <p:sp>
+        <p:nvSpPr>
+          <p:cNvPr id="163" name="CL"/>
+          <p:cNvSpPr/>
+          <p:nvPr/>
+        </p:nvSpPr>
+        <p:spPr>
+          <a:xfrm>
+            <a:off x="749300" y="4959350"/>
+            <a:ext cx="1270000" cy="228600"/>
+          </a:xfrm>
+          <a:prstGeom prst="rect">
+            <a:avLst/>
+          </a:prstGeom>
+          <a:noFill/>
+          <a:ln w="0">
+            <a:noFill/>
+          </a:ln>
+        </p:spPr>
+        <p:txBody>
+          <a:bodyPr wrap="square" lIns="0" tIns="0" rIns="0" bIns="0" anchor="ctr"/>
+          <a:lstStyle/>
+          <a:p>
+            <a:pPr algn="l"/>
+            <a:r>
+              <a:rPr lang="fr-FR" sz="900" b="1" dirty="0">
+                <a:solidFill>
+                  <a:srgbClr val="1A1A2E"/>
+                </a:solidFill>
+                <a:latin typeface="Inter"/>
+              </a:rPr>
+              <a:t>Deliverables</a:t>
+            </a:r>
+          </a:p>
+        </p:txBody>
+      </p:sp>
+      <p:sp>
+        <p:nvSpPr>
+          <p:cNvPr id="164" name="B"/>
+          <p:cNvSpPr/>
+          <p:nvPr/>
+        </p:nvSpPr>
+        <p:spPr>
+          <a:xfrm>
+            <a:off x="8056563" y="4686300"/>
+            <a:ext cx="1309688" cy="177800"/>
+          </a:xfrm>
+          <a:prstGeom prst="roundRect">
+            <a:avLst>
+              <a:gd name="adj" fmla="val 30000"/>
+            </a:avLst>
+          </a:prstGeom>
+          <a:solidFill>
+            <a:srgbClr val="7B83C1"/>
+          </a:solidFill>
+          <a:ln w="0">
+            <a:noFill/>
+          </a:ln>
+        </p:spPr>
+        <p:txBody>
+          <a:bodyPr/>
+          <a:lstStyle/>
+          <a:p>
+            <a:endParaRPr lang="fr-FR"/>
+          </a:p>
+        </p:txBody>
+      </p:sp>
+      <p:sp>
+        <p:nvSpPr>
+          <p:cNvPr id="165" name="L"/>
+          <p:cNvSpPr/>
+          <p:nvPr/>
+        </p:nvSpPr>
+        <p:spPr>
+          <a:xfrm>
+            <a:off x="9417050" y="4686300"/>
+            <a:ext cx="2393950" cy="177800"/>
+          </a:xfrm>
+          <a:prstGeom prst="rect">
+            <a:avLst/>
+          </a:prstGeom>
+          <a:noFill/>
+          <a:ln w="0">
+            <a:noFill/>
+          </a:ln>
+        </p:spPr>
+        <p:txBody>
+          <a:bodyPr wrap="square" lIns="0" tIns="0" rIns="0" bIns="0" anchor="ctr"/>
+          <a:lstStyle/>
+          <a:p>
+            <a:pPr algn="l"/>
+            <a:r>
+              <a:rPr lang="fr-FR" sz="800" dirty="0">
+                <a:solidFill>
+                  <a:srgbClr val="1A1A2E"/>
+                </a:solidFill>
+                <a:latin typeface="Inter"/>
+              </a:rPr>
+              <a:t>Final report</a:t>
+            </a:r>
+          </a:p>
+        </p:txBody>
+      </p:sp>
+      <p:sp>
+        <p:nvSpPr>
+          <p:cNvPr id="166" name="B"/>
+          <p:cNvSpPr/>
+          <p:nvPr/>
+        </p:nvSpPr>
+        <p:spPr>
+          <a:xfrm>
+            <a:off x="8842375" y="4978400"/>
+            <a:ext cx="1047750" cy="177800"/>
+          </a:xfrm>
+          <a:prstGeom prst="roundRect">
+            <a:avLst>
+              <a:gd name="adj" fmla="val 30000"/>
+            </a:avLst>
+          </a:prstGeom>
+          <a:solidFill>
+            <a:srgbClr val="7B83C1"/>
+          </a:solidFill>
+          <a:ln w="0">
+            <a:noFill/>
+          </a:ln>
+        </p:spPr>
+        <p:txBody>
+          <a:bodyPr/>
+          <a:lstStyle/>
+          <a:p>
+            <a:endParaRPr lang="fr-FR"/>
+          </a:p>
+        </p:txBody>
+      </p:sp>
+      <p:sp>
+        <p:nvSpPr>
+          <p:cNvPr id="167" name="L"/>
+          <p:cNvSpPr/>
+          <p:nvPr/>
+        </p:nvSpPr>
+        <p:spPr>
+          <a:xfrm>
+            <a:off x="9940925" y="4978400"/>
+            <a:ext cx="1870075" cy="177800"/>
+          </a:xfrm>
+          <a:prstGeom prst="rect">
+            <a:avLst/>
+          </a:prstGeom>
+          <a:noFill/>
+          <a:ln w="0">
+            <a:noFill/>
+          </a:ln>
+        </p:spPr>
+        <p:txBody>
+          <a:bodyPr wrap="square" lIns="0" tIns="0" rIns="0" bIns="0" anchor="ctr"/>
+          <a:lstStyle/>
+          <a:p>
+            <a:pPr algn="l"/>
+            <a:r>
+              <a:rPr lang="fr-FR" sz="800" dirty="0">
+                <a:solidFill>
+                  <a:srgbClr val="1A1A2E"/>
+                </a:solidFill>
+                <a:latin typeface="Inter"/>
+              </a:rPr>
+              <a:t>Presentation</a:t>
+            </a:r>
+          </a:p>
+        </p:txBody>
+      </p:sp>
+      <p:sp>
+        <p:nvSpPr>
+          <p:cNvPr id="168" name="DM"/>
+          <p:cNvSpPr/>
+          <p:nvPr/>
+        </p:nvSpPr>
+        <p:spPr>
+          <a:xfrm rot="2700000">
+            <a:off x="9813925" y="5283200"/>
+            <a:ext cx="152400" cy="152400"/>
+          </a:xfrm>
+          <a:prstGeom prst="rect">
+            <a:avLst/>
+          </a:prstGeom>
+          <a:solidFill>
+            <a:srgbClr val="6670B5"/>
+          </a:solidFill>
+          <a:ln w="0">
+            <a:noFill/>
+          </a:ln>
+        </p:spPr>
+        <p:txBody>
+          <a:bodyPr/>
+          <a:lstStyle/>
+          <a:p>
+            <a:endParaRPr lang="fr-FR"/>
+          </a:p>
+        </p:txBody>
+      </p:sp>
+      <p:sp>
+        <p:nvSpPr>
+          <p:cNvPr id="169" name="DL"/>
+          <p:cNvSpPr/>
+          <p:nvPr/>
+        </p:nvSpPr>
+        <p:spPr>
+          <a:xfrm>
+            <a:off x="9191625" y="5257800"/>
+            <a:ext cx="584200" cy="203200"/>
+          </a:xfrm>
+          <a:prstGeom prst="rect">
+            <a:avLst/>
+          </a:prstGeom>
+          <a:noFill/>
+          <a:ln w="0">
+            <a:noFill/>
+          </a:ln>
+        </p:spPr>
+        <p:txBody>
+          <a:bodyPr wrap="square" lIns="0" tIns="0" rIns="0" bIns="0" anchor="ctr"/>
+          <a:lstStyle/>
+          <a:p>
+            <a:pPr algn="r"/>
+            <a:r>
+              <a:rPr lang="fr-FR" sz="800" i="1" dirty="0">
+                <a:solidFill>
+                  <a:srgbClr val="6670B5"/>
+                </a:solidFill>
+                <a:latin typeface="Inter"/>
+              </a:rPr>
+              <a:t>Demo</a:t>
+            </a:r>
+          </a:p>
+        </p:txBody>
+      </p:sp>
+      <p:sp>
+        <p:nvSpPr>
+          <p:cNvPr id="170" name="F"/>
+          <p:cNvSpPr/>
+          <p:nvPr/>
+        </p:nvSpPr>
+        <p:spPr>
+          <a:xfrm>
+            <a:off x="698500" y="6070600"/>
+            <a:ext cx="3810000" cy="254000"/>
+          </a:xfrm>
+          <a:prstGeom prst="rect">
+            <a:avLst/>
+          </a:prstGeom>
+          <a:noFill/>
+          <a:ln w="0">
+            <a:noFill/>
+          </a:ln>
+        </p:spPr>
+        <p:txBody>
+          <a:bodyPr wrap="square" lIns="0" tIns="0" rIns="0" bIns="0" anchor="t"/>
+          <a:lstStyle/>
+          <a:p>
+            <a:pPr algn="l"/>
+            <a:r>
+              <a:rPr lang="fr-FR" sz="1400" dirty="0">
+                <a:solidFill>
+                  <a:srgbClr val="BFBFBF"/>
+                </a:solidFill>
+                <a:latin typeface="Inter"/>
+              </a:rPr>
+              <a:t>SERGE — SE618 Project</a:t>
+            </a:r>
+          </a:p>
+        </p:txBody>
+      </p:sp>
+    </p:spTree>
+    <p:extLst>
+      <p:ext uri="{BB962C8B-B14F-4D97-AF65-F5344CB8AC3E}">
+        <p14:creationId xmlns:p14="http://schemas.microsoft.com/office/powerpoint/2010/main" val="1420813582"/>
+      </p:ext>
+    </p:extLst>
+  </p:cSld>
+  <p:clrMapOvr>
+    <a:masterClrMapping/>
+  </p:clrMapOvr>
+</p:sld>
+</file>
+
+<file path=ppt/slides/slide13.xml><?xml version="1.0" encoding="utf-8"?>
+<p:sld xmlns:a="http://schemas.openxmlformats.org/drawingml/2006/main" xmlns:r="http://schemas.openxmlformats.org/officeDocument/2006/relationships" xmlns:p="http://schemas.openxmlformats.org/presentationml/2006/main">
+  <p:cSld>
     <p:spTree>
       <p:nvGrpSpPr>
         <p:cNvPr id="1" name=""/>
@@ -13246,7 +15812,7 @@
         </p:nvSpPr>
         <p:spPr>
           <a:xfrm>
-            <a:off x="889000" y="3657600"/>
+            <a:off x="900289" y="3657600"/>
             <a:ext cx="2540000" cy="304800"/>
           </a:xfrm>
           <a:prstGeom prst="rect">
@@ -14562,7 +17128,7 @@
         </p:nvSpPr>
         <p:spPr>
           <a:xfrm>
-            <a:off x="889000" y="444500"/>
+            <a:off x="889000" y="410633"/>
             <a:ext cx="7620000" cy="533400"/>
           </a:xfrm>
           <a:prstGeom prst="rect">
@@ -14696,7 +17262,7 @@
         </p:nvSpPr>
         <p:spPr>
           <a:xfrm>
-            <a:off x="3048000" y="1498600"/>
+            <a:off x="3365500" y="1485900"/>
             <a:ext cx="1016000" cy="279400"/>
           </a:xfrm>
           <a:prstGeom prst="rect">
@@ -14712,7 +17278,7 @@
           <a:p>
             <a:pPr algn="l"/>
             <a:r>
-              <a:rPr lang="fr-FR" sz="1400">
+              <a:rPr lang="fr-FR" sz="1400" dirty="0">
                 <a:solidFill>
                   <a:srgbClr val="8E8E9A"/>
                 </a:solidFill>
